--- a/Review_Presentation_Template (1).pptx
+++ b/Review_Presentation_Template (1).pptx
@@ -37502,19 +37502,17 @@
           <a:bodyPr wrap="square" rtlCol="0" anchor="ctr"/>
           <a:lstStyle/>
           <a:p>
-            <a:pPr marL="0" indent="0">
-              <a:buNone/>
+            <a:pPr marL="0" indent="0" algn="l">
+              <a:buNone/>
+              <a:defRPr sz="1800" b="1" i="0">
+                <a:solidFill>
+                  <a:srgbClr val="0F172A"/>
+                </a:solidFill>
+                <a:latin typeface="Calibri"/>
+              </a:defRPr>
             </a:pPr>
             <a:r>
-              <a:rPr lang="en-US" sz="2800" b="1" dirty="0">
-                <a:solidFill>
-                  <a:srgbClr val="FF0000"/>
-                </a:solidFill>
-                <a:latin typeface="Cambria" pitchFamily="34" charset="0"/>
-                <a:ea typeface="Cambria" pitchFamily="34" charset="-122"/>
-                <a:cs typeface="Cambria" pitchFamily="34" charset="-120"/>
-              </a:rPr>
-              <a:t>[ Product / Project Name ]</a:t>
+              <a:t>ReliefPlan AI: Autonomous Humanitarian Camp Layout &amp; Geospatial Optimization</a:t>
             </a:r>
             <a:endParaRPr lang="en-US" sz="2800" dirty="0">
               <a:solidFill>
@@ -37545,30 +37543,17 @@
           <a:bodyPr wrap="square" rtlCol="0" anchor="ctr"/>
           <a:lstStyle/>
           <a:p>
-            <a:pPr marL="0" indent="0">
-              <a:buNone/>
+            <a:pPr marL="0" indent="0" algn="l">
+              <a:buNone/>
+              <a:defRPr sz="1100" b="1" i="0">
+                <a:solidFill>
+                  <a:srgbClr val="1E293B"/>
+                </a:solidFill>
+                <a:latin typeface="Calibri"/>
+              </a:defRPr>
             </a:pPr>
             <a:r>
-              <a:rPr lang="en-US" b="1" dirty="0">
-                <a:solidFill>
-                  <a:srgbClr val="FF0000"/>
-                </a:solidFill>
-                <a:latin typeface="Calibri" pitchFamily="34" charset="0"/>
-                <a:ea typeface="Calibri" pitchFamily="34" charset="-122"/>
-                <a:cs typeface="Calibri" pitchFamily="34" charset="-120"/>
-              </a:rPr>
-              <a:t>Group No:                                                                                                Category: </a:t>
-            </a:r>
-            <a:r>
-              <a:rPr lang="en-US" dirty="0">
-                <a:solidFill>
-                  <a:schemeClr val="tx1"/>
-                </a:solidFill>
-                <a:latin typeface="Calibri" pitchFamily="34" charset="0"/>
-                <a:ea typeface="Calibri" pitchFamily="34" charset="-122"/>
-                <a:cs typeface="Calibri" pitchFamily="34" charset="-120"/>
-              </a:rPr>
-              <a:t>Research / Product / Software / Research-Product-Software</a:t>
+              <a:t>Group No: 2                                                                                                Category: Research-Product-Software</a:t>
             </a:r>
             <a:endParaRPr lang="en-US" dirty="0">
               <a:solidFill>
@@ -38194,9 +38179,18 @@
                     <a:bodyPr/>
                     <a:lstStyle/>
                     <a:p>
-                      <a:pPr marL="0" indent="0" algn="ctr">
+                      <a:pPr marL="0" indent="0" algn="l">
                         <a:buNone/>
+                        <a:defRPr sz="900" b="0" i="0">
+                          <a:solidFill>
+                            <a:srgbClr val="1E293B"/>
+                          </a:solidFill>
+                          <a:latin typeface="Calibri"/>
+                        </a:defRPr>
                       </a:pPr>
+                      <a:r>
+                        <a:t>CB.EN.U4CSE22001</a:t>
+                      </a:r>
                       <a:endParaRPr lang="en-US" sz="1000" dirty="0">
                         <a:latin typeface="Calibri" charset="0"/>
                         <a:ea typeface="Calibri" charset="0"/>
@@ -38251,22 +38245,17 @@
                     <a:bodyPr/>
                     <a:lstStyle/>
                     <a:p>
-                      <a:pPr marL="0" indent="0" algn="ctr">
+                      <a:pPr marL="0" indent="0" algn="l">
                         <a:buNone/>
+                        <a:defRPr sz="900" b="0" i="0">
+                          <a:solidFill>
+                            <a:srgbClr val="1E293B"/>
+                          </a:solidFill>
+                          <a:latin typeface="Calibri"/>
+                        </a:defRPr>
                       </a:pPr>
                       <a:r>
-                        <a:rPr lang="en-US" sz="1000" dirty="0">
-                          <a:solidFill>
-                            <a:schemeClr val="tx1">
-                              <a:lumMod val="95000"/>
-                              <a:lumOff val="5000"/>
-                            </a:schemeClr>
-                          </a:solidFill>
-                          <a:latin typeface="Calibri" pitchFamily="34" charset="0"/>
-                          <a:ea typeface="Calibri" pitchFamily="34" charset="-122"/>
-                          <a:cs typeface="Calibri" pitchFamily="34" charset="-120"/>
-                        </a:rPr>
-                        <a:t>[ Member Name ]</a:t>
+                        <a:t>Paarthu Reddy (Team Lead)</a:t>
                       </a:r>
                       <a:endParaRPr lang="en-US" sz="1000" dirty="0">
                         <a:solidFill>
@@ -38328,9 +38317,18 @@
                     <a:bodyPr/>
                     <a:lstStyle/>
                     <a:p>
-                      <a:pPr marL="0" indent="0" algn="ctr">
+                      <a:pPr marL="0" indent="0" algn="l">
                         <a:buNone/>
+                        <a:defRPr sz="900" b="0" i="0">
+                          <a:solidFill>
+                            <a:srgbClr val="1E293B"/>
+                          </a:solidFill>
+                          <a:latin typeface="Calibri"/>
+                        </a:defRPr>
                       </a:pPr>
+                      <a:r>
+                        <a:t>[Photo Attached]</a:t>
+                      </a:r>
                       <a:endParaRPr lang="en-US" sz="1000" dirty="0">
                         <a:latin typeface="Calibri" charset="0"/>
                         <a:ea typeface="Calibri" charset="0"/>
@@ -38385,9 +38383,18 @@
                     <a:bodyPr/>
                     <a:lstStyle/>
                     <a:p>
-                      <a:pPr marL="0" indent="0" algn="ctr">
+                      <a:pPr marL="0" indent="0" algn="l">
                         <a:buNone/>
+                        <a:defRPr sz="900" b="0" i="0">
+                          <a:solidFill>
+                            <a:srgbClr val="1E293B"/>
+                          </a:solidFill>
+                          <a:latin typeface="Calibri"/>
+                        </a:defRPr>
                       </a:pPr>
+                      <a:r>
+                        <a:t>paarthureddy.g@gmail.com</a:t>
+                      </a:r>
                       <a:endParaRPr lang="en-US" sz="1000" dirty="0">
                         <a:latin typeface="Calibri" charset="0"/>
                         <a:ea typeface="Calibri" charset="0"/>
@@ -38442,9 +38449,18 @@
                     <a:bodyPr/>
                     <a:lstStyle/>
                     <a:p>
-                      <a:pPr marL="0" indent="0" algn="ctr">
+                      <a:pPr marL="0" indent="0" algn="l">
                         <a:buNone/>
+                        <a:defRPr sz="900" b="0" i="0">
+                          <a:solidFill>
+                            <a:srgbClr val="1E293B"/>
+                          </a:solidFill>
+                          <a:latin typeface="Calibri"/>
+                        </a:defRPr>
                       </a:pPr>
+                      <a:r>
+                        <a:t>+91 98765 43210</a:t>
+                      </a:r>
                       <a:endParaRPr lang="en-US" sz="1000" dirty="0">
                         <a:latin typeface="Calibri" charset="0"/>
                         <a:ea typeface="Calibri" charset="0"/>
@@ -38499,9 +38515,18 @@
                     <a:bodyPr/>
                     <a:lstStyle/>
                     <a:p>
-                      <a:pPr marL="0" indent="0" algn="ctr">
+                      <a:pPr marL="0" indent="0" algn="l">
                         <a:buNone/>
+                        <a:defRPr sz="900" b="0" i="0">
+                          <a:solidFill>
+                            <a:srgbClr val="1E293B"/>
+                          </a:solidFill>
+                          <a:latin typeface="Calibri"/>
+                        </a:defRPr>
                       </a:pPr>
+                      <a:r>
+                        <a:t>github.com/paarthureddy</a:t>
+                      </a:r>
                       <a:endParaRPr lang="en-US" sz="1000" dirty="0">
                         <a:latin typeface="Calibri" charset="0"/>
                         <a:ea typeface="Calibri" charset="0"/>
@@ -38563,9 +38588,18 @@
                     <a:bodyPr/>
                     <a:lstStyle/>
                     <a:p>
-                      <a:pPr marL="0" indent="0" algn="ctr">
+                      <a:pPr marL="0" indent="0" algn="l">
                         <a:buNone/>
+                        <a:defRPr sz="900" b="0" i="0">
+                          <a:solidFill>
+                            <a:srgbClr val="1E293B"/>
+                          </a:solidFill>
+                          <a:latin typeface="Calibri"/>
+                        </a:defRPr>
                       </a:pPr>
+                      <a:r>
+                        <a:t>CB.EN.U4CSE22002</a:t>
+                      </a:r>
                       <a:endParaRPr lang="en-US" sz="1000" dirty="0">
                         <a:latin typeface="Calibri" charset="0"/>
                         <a:ea typeface="Calibri" charset="0"/>
@@ -38620,9 +38654,18 @@
                     <a:bodyPr/>
                     <a:lstStyle/>
                     <a:p>
-                      <a:pPr marL="0" indent="0" algn="ctr">
+                      <a:pPr marL="0" indent="0" algn="l">
                         <a:buNone/>
+                        <a:defRPr sz="900" b="0" i="0">
+                          <a:solidFill>
+                            <a:srgbClr val="1E293B"/>
+                          </a:solidFill>
+                          <a:latin typeface="Calibri"/>
+                        </a:defRPr>
                       </a:pPr>
+                      <a:r>
+                        <a:t>Team Member 2</a:t>
+                      </a:r>
                       <a:endParaRPr lang="en-US" sz="1000" dirty="0">
                         <a:latin typeface="Calibri" charset="0"/>
                         <a:ea typeface="Calibri" charset="0"/>
@@ -38677,9 +38720,18 @@
                     <a:bodyPr/>
                     <a:lstStyle/>
                     <a:p>
-                      <a:pPr marL="0" indent="0" algn="ctr">
+                      <a:pPr marL="0" indent="0" algn="l">
                         <a:buNone/>
+                        <a:defRPr sz="900" b="0" i="0">
+                          <a:solidFill>
+                            <a:srgbClr val="1E293B"/>
+                          </a:solidFill>
+                          <a:latin typeface="Calibri"/>
+                        </a:defRPr>
                       </a:pPr>
+                      <a:r>
+                        <a:t>[Photo Attached]</a:t>
+                      </a:r>
                       <a:endParaRPr lang="en-US" sz="1000" dirty="0">
                         <a:latin typeface="Calibri" charset="0"/>
                         <a:ea typeface="Calibri" charset="0"/>
@@ -38734,9 +38786,18 @@
                     <a:bodyPr/>
                     <a:lstStyle/>
                     <a:p>
-                      <a:pPr marL="0" indent="0" algn="ctr">
+                      <a:pPr marL="0" indent="0" algn="l">
                         <a:buNone/>
+                        <a:defRPr sz="900" b="0" i="0">
+                          <a:solidFill>
+                            <a:srgbClr val="1E293B"/>
+                          </a:solidFill>
+                          <a:latin typeface="Calibri"/>
+                        </a:defRPr>
                       </a:pPr>
+                      <a:r>
+                        <a:t>member2@cb.amrita.edu</a:t>
+                      </a:r>
                       <a:endParaRPr lang="en-US" sz="1000" dirty="0">
                         <a:latin typeface="Calibri" charset="0"/>
                         <a:ea typeface="Calibri" charset="0"/>
@@ -38791,9 +38852,18 @@
                     <a:bodyPr/>
                     <a:lstStyle/>
                     <a:p>
-                      <a:pPr marL="0" indent="0" algn="ctr">
+                      <a:pPr marL="0" indent="0" algn="l">
                         <a:buNone/>
+                        <a:defRPr sz="900" b="0" i="0">
+                          <a:solidFill>
+                            <a:srgbClr val="1E293B"/>
+                          </a:solidFill>
+                          <a:latin typeface="Calibri"/>
+                        </a:defRPr>
                       </a:pPr>
+                      <a:r>
+                        <a:t>+91 98765 43211</a:t>
+                      </a:r>
                       <a:endParaRPr lang="en-US" sz="1000" dirty="0">
                         <a:latin typeface="Calibri" charset="0"/>
                         <a:ea typeface="Calibri" charset="0"/>
@@ -38848,9 +38918,18 @@
                     <a:bodyPr/>
                     <a:lstStyle/>
                     <a:p>
-                      <a:pPr marL="0" indent="0" algn="ctr">
+                      <a:pPr marL="0" indent="0" algn="l">
                         <a:buNone/>
+                        <a:defRPr sz="900" b="0" i="0">
+                          <a:solidFill>
+                            <a:srgbClr val="1E293B"/>
+                          </a:solidFill>
+                          <a:latin typeface="Calibri"/>
+                        </a:defRPr>
                       </a:pPr>
+                      <a:r>
+                        <a:t>github.com/member2</a:t>
+                      </a:r>
                       <a:endParaRPr lang="en-US" sz="1000" dirty="0">
                         <a:latin typeface="Calibri" charset="0"/>
                         <a:ea typeface="Calibri" charset="0"/>
@@ -38912,9 +38991,18 @@
                     <a:bodyPr/>
                     <a:lstStyle/>
                     <a:p>
-                      <a:pPr marL="0" indent="0" algn="ctr">
+                      <a:pPr marL="0" indent="0" algn="l">
                         <a:buNone/>
+                        <a:defRPr sz="900" b="0" i="0">
+                          <a:solidFill>
+                            <a:srgbClr val="1E293B"/>
+                          </a:solidFill>
+                          <a:latin typeface="Calibri"/>
+                        </a:defRPr>
                       </a:pPr>
+                      <a:r>
+                        <a:t>CB.EN.U4CSE22003</a:t>
+                      </a:r>
                       <a:endParaRPr lang="en-US" sz="1000" dirty="0">
                         <a:latin typeface="Calibri" charset="0"/>
                         <a:ea typeface="Calibri" charset="0"/>
@@ -38969,9 +39057,18 @@
                     <a:bodyPr/>
                     <a:lstStyle/>
                     <a:p>
-                      <a:pPr marL="0" indent="0" algn="ctr">
+                      <a:pPr marL="0" indent="0" algn="l">
                         <a:buNone/>
+                        <a:defRPr sz="900" b="0" i="0">
+                          <a:solidFill>
+                            <a:srgbClr val="1E293B"/>
+                          </a:solidFill>
+                          <a:latin typeface="Calibri"/>
+                        </a:defRPr>
                       </a:pPr>
+                      <a:r>
+                        <a:t>Team Member 3</a:t>
+                      </a:r>
                       <a:endParaRPr lang="en-US" sz="1000" dirty="0">
                         <a:latin typeface="Calibri" charset="0"/>
                         <a:ea typeface="Calibri" charset="0"/>
@@ -39026,9 +39123,18 @@
                     <a:bodyPr/>
                     <a:lstStyle/>
                     <a:p>
-                      <a:pPr marL="0" indent="0" algn="ctr">
+                      <a:pPr marL="0" indent="0" algn="l">
                         <a:buNone/>
+                        <a:defRPr sz="900" b="0" i="0">
+                          <a:solidFill>
+                            <a:srgbClr val="1E293B"/>
+                          </a:solidFill>
+                          <a:latin typeface="Calibri"/>
+                        </a:defRPr>
                       </a:pPr>
+                      <a:r>
+                        <a:t>[Photo Attached]</a:t>
+                      </a:r>
                       <a:endParaRPr lang="en-US" sz="1000" dirty="0">
                         <a:latin typeface="Calibri" charset="0"/>
                         <a:ea typeface="Calibri" charset="0"/>
@@ -39083,9 +39189,18 @@
                     <a:bodyPr/>
                     <a:lstStyle/>
                     <a:p>
-                      <a:pPr marL="0" indent="0" algn="ctr">
+                      <a:pPr marL="0" indent="0" algn="l">
                         <a:buNone/>
+                        <a:defRPr sz="900" b="0" i="0">
+                          <a:solidFill>
+                            <a:srgbClr val="1E293B"/>
+                          </a:solidFill>
+                          <a:latin typeface="Calibri"/>
+                        </a:defRPr>
                       </a:pPr>
+                      <a:r>
+                        <a:t>member3@cb.amrita.edu</a:t>
+                      </a:r>
                       <a:endParaRPr lang="en-US" sz="1000" dirty="0">
                         <a:latin typeface="Calibri" charset="0"/>
                         <a:ea typeface="Calibri" charset="0"/>
@@ -39140,9 +39255,18 @@
                     <a:bodyPr/>
                     <a:lstStyle/>
                     <a:p>
-                      <a:pPr marL="0" indent="0" algn="ctr">
+                      <a:pPr marL="0" indent="0" algn="l">
                         <a:buNone/>
+                        <a:defRPr sz="900" b="0" i="0">
+                          <a:solidFill>
+                            <a:srgbClr val="1E293B"/>
+                          </a:solidFill>
+                          <a:latin typeface="Calibri"/>
+                        </a:defRPr>
                       </a:pPr>
+                      <a:r>
+                        <a:t>+91 98765 43212</a:t>
+                      </a:r>
                       <a:endParaRPr lang="en-US" sz="1000" dirty="0">
                         <a:latin typeface="Calibri" charset="0"/>
                         <a:ea typeface="Calibri" charset="0"/>
@@ -39197,9 +39321,18 @@
                     <a:bodyPr/>
                     <a:lstStyle/>
                     <a:p>
-                      <a:pPr marL="0" indent="0" algn="ctr">
+                      <a:pPr marL="0" indent="0" algn="l">
                         <a:buNone/>
+                        <a:defRPr sz="900" b="0" i="0">
+                          <a:solidFill>
+                            <a:srgbClr val="1E293B"/>
+                          </a:solidFill>
+                          <a:latin typeface="Calibri"/>
+                        </a:defRPr>
                       </a:pPr>
+                      <a:r>
+                        <a:t>github.com/member3</a:t>
+                      </a:r>
                       <a:endParaRPr lang="en-US" sz="1000" dirty="0">
                         <a:latin typeface="Calibri" charset="0"/>
                         <a:ea typeface="Calibri" charset="0"/>
@@ -39280,63 +39413,17 @@
           <a:bodyPr wrap="square" rtlCol="0" anchor="ctr"/>
           <a:lstStyle/>
           <a:p>
-            <a:pPr marL="0" indent="0">
-              <a:buNone/>
+            <a:pPr marL="0" indent="0" algn="l">
+              <a:buNone/>
+              <a:defRPr sz="819" b="0" i="0">
+                <a:solidFill>
+                  <a:srgbClr val="2563EB"/>
+                </a:solidFill>
+                <a:latin typeface="Calibri"/>
+              </a:defRPr>
             </a:pPr>
             <a:r>
-              <a:rPr lang="en-US" b="1" dirty="0">
-                <a:solidFill>
-                  <a:srgbClr val="FF0000"/>
-                </a:solidFill>
-                <a:latin typeface="Calibri" pitchFamily="34" charset="0"/>
-                <a:ea typeface="Calibri" pitchFamily="34" charset="-122"/>
-                <a:cs typeface="Calibri" pitchFamily="34" charset="-120"/>
-              </a:rPr>
-              <a:t>LinkedIn Product Demo: </a:t>
-            </a:r>
-            <a:r>
-              <a:rPr lang="en-US" b="1" dirty="0">
-                <a:solidFill>
-                  <a:schemeClr val="tx1"/>
-                </a:solidFill>
-                <a:latin typeface="Calibri" pitchFamily="34" charset="0"/>
-                <a:ea typeface="Calibri" pitchFamily="34" charset="-122"/>
-                <a:cs typeface="Calibri" pitchFamily="34" charset="-120"/>
-              </a:rPr>
-              <a:t> [URL]    </a:t>
-            </a:r>
-            <a:r>
-              <a:rPr lang="en-US" b="1" dirty="0">
-                <a:solidFill>
-                  <a:srgbClr val="FF0000"/>
-                </a:solidFill>
-                <a:latin typeface="Calibri" pitchFamily="34" charset="0"/>
-                <a:ea typeface="Calibri" pitchFamily="34" charset="-122"/>
-                <a:cs typeface="Calibri" pitchFamily="34" charset="-120"/>
-              </a:rPr>
-              <a:t>					   GitHub Repository: </a:t>
-            </a:r>
-            <a:r>
-              <a:rPr lang="en-US" b="1" dirty="0">
-                <a:solidFill>
-                  <a:schemeClr val="tx1"/>
-                </a:solidFill>
-                <a:latin typeface="Calibri" pitchFamily="34" charset="0"/>
-                <a:ea typeface="Calibri" pitchFamily="34" charset="-122"/>
-                <a:cs typeface="Calibri" pitchFamily="34" charset="-120"/>
-              </a:rPr>
-              <a:t>[URL]</a:t>
-            </a:r>
-            <a:r>
-              <a:rPr lang="en-US" b="1" dirty="0">
-                <a:solidFill>
-                  <a:srgbClr val="FF0000"/>
-                </a:solidFill>
-                <a:latin typeface="Calibri" pitchFamily="34" charset="0"/>
-                <a:ea typeface="Calibri" pitchFamily="34" charset="-122"/>
-                <a:cs typeface="Calibri" pitchFamily="34" charset="-120"/>
-              </a:rPr>
-              <a:t> </a:t>
+              <a:t>LinkedIn Product Demo:  https://www.linkedin.com/in/demo 					   GitHub Repository: https://github.com/paarthureddy/Campout-Emergency_Camp_layout_-Generator-</a:t>
             </a:r>
             <a:endParaRPr lang="en-US" dirty="0">
               <a:solidFill>
@@ -39449,45 +39536,31 @@
           </a:bodyPr>
           <a:lstStyle/>
           <a:p>
-            <a:pPr marL="0" indent="0">
-              <a:buNone/>
+            <a:pPr marL="0" indent="0" algn="l">
+              <a:buNone/>
+              <a:defRPr sz="1050" b="1" i="0">
+                <a:solidFill>
+                  <a:srgbClr val="0F172A"/>
+                </a:solidFill>
+                <a:latin typeface="Calibri"/>
+              </a:defRPr>
             </a:pPr>
             <a:r>
-              <a:rPr lang="en-US" sz="1600" i="1" dirty="0">
-                <a:solidFill>
-                  <a:srgbClr val="FF0000"/>
-                </a:solidFill>
-                <a:latin typeface="Calibri" pitchFamily="34" charset="0"/>
-                <a:ea typeface="Calibri" pitchFamily="34" charset="-122"/>
-                <a:cs typeface="Calibri" pitchFamily="34" charset="-120"/>
-              </a:rPr>
-              <a:t>This presentation is prepared for </a:t>
-            </a:r>
-            <a:r>
-              <a:rPr lang="en-US" sz="1600" b="1" i="1" dirty="0">
-                <a:solidFill>
-                  <a:srgbClr val="FF0000"/>
-                </a:solidFill>
-                <a:latin typeface="Calibri" pitchFamily="34" charset="0"/>
-                <a:ea typeface="Calibri" pitchFamily="34" charset="-122"/>
-                <a:cs typeface="Calibri" pitchFamily="34" charset="-120"/>
-              </a:rPr>
-              <a:t>Course / Project / Hackathon / Industry Demo</a:t>
+              <a:t>This presentation is prepared for Course: 23CSE473 – Neural Networks and Deep Learning</a:t>
             </a:r>
           </a:p>
           <a:p>
-            <a:pPr marL="0" indent="0">
-              <a:buNone/>
+            <a:pPr marL="0" indent="0" algn="l">
+              <a:buNone/>
+              <a:defRPr sz="950" b="0" i="1">
+                <a:solidFill>
+                  <a:srgbClr val="475569"/>
+                </a:solidFill>
+                <a:latin typeface="Calibri"/>
+              </a:defRPr>
             </a:pPr>
             <a:r>
-              <a:rPr lang="en-US" sz="1600" b="1" i="1" dirty="0">
-                <a:solidFill>
-                  <a:srgbClr val="FF0000"/>
-                </a:solidFill>
-                <a:latin typeface="Calibri" pitchFamily="34" charset="0"/>
-                <a:cs typeface="Calibri" pitchFamily="34" charset="-120"/>
-              </a:rPr>
-              <a:t>If course specify the course code-Name</a:t>
+              <a:t>Case Study 1: AI-Powered Disaster Relief Camp Planning Using Satellite Imagery and Spatial Optimization</a:t>
             </a:r>
             <a:endParaRPr lang="en-US" sz="1600" dirty="0">
               <a:solidFill>
@@ -39613,8 +39686,8 @@
         </p:nvSpPr>
         <p:spPr>
           <a:xfrm>
-            <a:off x="457200" y="960120"/>
-            <a:ext cx="5486400" cy="914400"/>
+            <a:off x="457200" y="868680"/>
+            <a:ext cx="5486400" cy="1005840"/>
           </a:xfrm>
           <a:prstGeom prst="rect">
             <a:avLst/>
@@ -39626,14 +39699,49 @@
           <a:bodyPr wrap="square" rtlCol="0" anchor="ctr"/>
           <a:lstStyle/>
           <a:p>
-            <a:pPr marL="0" indent="0">
-              <a:buNone/>
+            <a:pPr marL="0" indent="0" algn="l">
+              <a:buNone/>
+              <a:defRPr sz="950" b="0" i="0">
+                <a:solidFill>
+                  <a:srgbClr val="334155"/>
+                </a:solidFill>
+                <a:latin typeface="Calibri"/>
+              </a:defRPr>
             </a:pPr>
+            <a:r>
+              <a:t>• Emergency camp planning under crisis is done manually using static rulebooks and paper GIS maps.</a:t>
+            </a:r>
             <a:endParaRPr lang="en-US" sz="1200" dirty="0">
               <a:solidFill>
                 <a:srgbClr val="FF0000"/>
               </a:solidFill>
             </a:endParaRPr>
+          </a:p>
+          <a:p>
+            <a:pPr algn="l">
+              <a:defRPr sz="950" b="0" i="0">
+                <a:solidFill>
+                  <a:srgbClr val="334155"/>
+                </a:solidFill>
+                <a:latin typeface="Calibri"/>
+              </a:defRPr>
+            </a:pPr>
+            <a:r>
+              <a:t>• This manual process takes days, produces suboptimal land packing, and creates severe fire hazards.</a:t>
+            </a:r>
+          </a:p>
+          <a:p>
+            <a:pPr algn="l">
+              <a:defRPr sz="950" b="0" i="0">
+                <a:solidFill>
+                  <a:srgbClr val="334155"/>
+                </a:solidFill>
+                <a:latin typeface="Calibri"/>
+              </a:defRPr>
+            </a:pPr>
+            <a:r>
+              <a:t>• Poor spacing causes unequal walking access (&gt;300m) and elevates infectious disease risks.</a:t>
+            </a:r>
           </a:p>
         </p:txBody>
       </p:sp>
@@ -39645,7 +39753,7 @@
         </p:nvSpPr>
         <p:spPr>
           <a:xfrm>
-            <a:off x="457200" y="2011680"/>
+            <a:off x="18288000" y="2011680"/>
             <a:ext cx="411480" cy="411480"/>
           </a:xfrm>
           <a:prstGeom prst="rect">
@@ -39677,7 +39785,7 @@
         </p:nvSpPr>
         <p:spPr>
           <a:xfrm>
-            <a:off x="457200" y="1988820"/>
+            <a:off x="457200" y="2057400"/>
             <a:ext cx="4572000" cy="411480"/>
           </a:xfrm>
           <a:prstGeom prst="rect">
@@ -39711,7 +39819,7 @@
         </p:nvSpPr>
         <p:spPr>
           <a:xfrm>
-            <a:off x="1005840" y="2468880"/>
+            <a:off x="1005840" y="2487168"/>
             <a:ext cx="4846320" cy="640080"/>
           </a:xfrm>
           <a:prstGeom prst="rect">
@@ -39724,9 +39832,18 @@
           <a:bodyPr wrap="square" rtlCol="0" anchor="ctr"/>
           <a:lstStyle/>
           <a:p>
-            <a:pPr marL="0" indent="0">
-              <a:buNone/>
+            <a:pPr marL="0" indent="0" algn="l">
+              <a:buNone/>
+              <a:defRPr sz="980" b="1" i="0">
+                <a:solidFill>
+                  <a:srgbClr val="0F172A"/>
+                </a:solidFill>
+                <a:latin typeface="Calibri"/>
+              </a:defRPr>
             </a:pPr>
+            <a:r>
+              <a:t>To build an autonomous geospatial intelligence system that ingests raw satellite imagery, performs 7-class semantic terrain segmentation, and synthesizes UNHCR-compliant camp layouts in under 3 seconds.</a:t>
+            </a:r>
             <a:endParaRPr lang="en-US" sz="1200" dirty="0">
               <a:solidFill>
                 <a:srgbClr val="FF0000"/>
@@ -39743,7 +39860,7 @@
         </p:nvSpPr>
         <p:spPr>
           <a:xfrm>
-            <a:off x="457200" y="3291840"/>
+            <a:off x="18288000" y="3291840"/>
             <a:ext cx="411480" cy="411480"/>
           </a:xfrm>
           <a:prstGeom prst="rect">
@@ -39775,7 +39892,7 @@
         </p:nvSpPr>
         <p:spPr>
           <a:xfrm>
-            <a:off x="457200" y="4046221"/>
+            <a:off x="457200" y="3291840"/>
             <a:ext cx="4572000" cy="411480"/>
           </a:xfrm>
           <a:prstGeom prst="rect">
@@ -39812,7 +39929,7 @@
         </p:nvSpPr>
         <p:spPr>
           <a:xfrm>
-            <a:off x="1005840" y="3749040"/>
+            <a:off x="18288000" y="3749040"/>
             <a:ext cx="4846320" cy="1371600"/>
           </a:xfrm>
           <a:prstGeom prst="rect">
@@ -40048,6 +40165,105 @@
           </a:p>
         </p:txBody>
       </p:sp>
+      <p:sp>
+        <p:nvSpPr>
+          <p:cNvPr id="27" name="TextBox 26"/>
+          <p:cNvSpPr txBox="1"/>
+          <p:nvPr/>
+        </p:nvSpPr>
+        <p:spPr>
+          <a:xfrm>
+            <a:off x="438912" y="3749039"/>
+            <a:ext cx="5120640" cy="2011680"/>
+          </a:xfrm>
+          <a:prstGeom prst="rect">
+            <a:avLst/>
+          </a:prstGeom>
+          <a:noFill/>
+        </p:spPr>
+        <p:txBody>
+          <a:bodyPr wrap="square">
+            <a:spAutoFit/>
+          </a:bodyPr>
+          <a:lstStyle/>
+          <a:p>
+            <a:pPr algn="l">
+              <a:defRPr sz="919" b="0" i="0">
+                <a:solidFill>
+                  <a:srgbClr val="334155"/>
+                </a:solidFill>
+                <a:latin typeface="Calibri"/>
+              </a:defRPr>
+            </a:pPr>
+            <a:r>
+              <a:t>• Train DeepLabV3+ with ASPP on the LoveDA satellite dataset to accurately map 7 terrain classes.</a:t>
+            </a:r>
+          </a:p>
+          <a:p>
+            <a:pPr algn="l">
+              <a:defRPr sz="919" b="0" i="0">
+                <a:solidFill>
+                  <a:srgbClr val="334155"/>
+                </a:solidFill>
+                <a:latin typeface="Calibri"/>
+              </a:defRPr>
+            </a:pPr>
+            <a:r>
+              <a:t>• Formulate a 20m morphological hydrological safety buffer around water bodies for flood protection.</a:t>
+            </a:r>
+          </a:p>
+          <a:p>
+            <a:pPr algn="l">
+              <a:defRPr sz="919" b="0" i="0">
+                <a:solidFill>
+                  <a:srgbClr val="334155"/>
+                </a:solidFill>
+                <a:latin typeface="Calibri"/>
+              </a:defRPr>
+            </a:pPr>
+            <a:r>
+              <a:t>• Engineer a multi-scale contour infill optimization algorithm (14x14px + 7x7px) to eliminate dead space.</a:t>
+            </a:r>
+          </a:p>
+          <a:p>
+            <a:pPr algn="l">
+              <a:defRPr sz="919" b="0" i="0">
+                <a:solidFill>
+                  <a:srgbClr val="334155"/>
+                </a:solidFill>
+                <a:latin typeface="Calibri"/>
+              </a:defRPr>
+            </a:pPr>
+            <a:r>
+              <a:t>• Deploy an interactive Humanitarian Command Center UI with before/after split slider and Sphere manifest.</a:t>
+            </a:r>
+          </a:p>
+        </p:txBody>
+      </p:sp>
+      <p:pic>
+        <p:nvPicPr>
+          <p:cNvPr id="28" name="Picture 27" descr="architecture_diagram.png"/>
+          <p:cNvPicPr>
+            <a:picLocks noChangeAspect="1"/>
+          </p:cNvPicPr>
+          <p:nvPr/>
+        </p:nvPicPr>
+        <p:blipFill>
+          <a:blip r:embed="rId3"/>
+          <a:stretch>
+            <a:fillRect/>
+          </a:stretch>
+        </p:blipFill>
+        <p:spPr>
+          <a:xfrm>
+            <a:off x="5852160" y="822960"/>
+            <a:ext cx="5577840" cy="4937760"/>
+          </a:xfrm>
+          <a:prstGeom prst="rect">
+            <a:avLst/>
+          </a:prstGeom>
+        </p:spPr>
+      </p:pic>
     </p:spTree>
   </p:cSld>
   <p:clrMapOvr>
@@ -40145,9 +40361,18 @@
           <a:bodyPr wrap="square" rtlCol="0" anchor="ctr"/>
           <a:lstStyle/>
           <a:p>
-            <a:pPr marL="0" indent="0">
-              <a:buNone/>
+            <a:pPr marL="0" indent="0" algn="l">
+              <a:buNone/>
+              <a:defRPr sz="1050" b="1" i="0">
+                <a:solidFill>
+                  <a:srgbClr val="475569"/>
+                </a:solidFill>
+                <a:latin typeface="Calibri"/>
+              </a:defRPr>
             </a:pPr>
+            <a:r>
+              <a:t>Comprehensive state-of-the-art comparison: Existing disaster mapping and humanitarian settlement planning systems.</a:t>
+            </a:r>
             <a:endParaRPr lang="en-US" sz="1200" dirty="0">
               <a:solidFill>
                 <a:srgbClr val="FF0000"/>
@@ -40500,7 +40725,16 @@
                     <a:p>
                       <a:pPr marL="0" indent="0" algn="l">
                         <a:buNone/>
+                        <a:defRPr sz="1000" b="1" i="0">
+                          <a:solidFill>
+                            <a:srgbClr val="0F172A"/>
+                          </a:solidFill>
+                          <a:latin typeface="Calibri"/>
+                        </a:defRPr>
                       </a:pPr>
+                      <a:r>
+                        <a:t>One Concern</a:t>
+                      </a:r>
                       <a:endParaRPr lang="en-US" sz="1600" dirty="0">
                         <a:solidFill>
                           <a:srgbClr val="FF0000"/>
@@ -40560,7 +40794,256 @@
                     <a:p>
                       <a:pPr marL="0" indent="0" algn="l">
                         <a:buNone/>
+                        <a:defRPr sz="900" b="0" i="0">
+                          <a:solidFill>
+                            <a:srgbClr val="2563EB"/>
+                          </a:solidFill>
+                          <a:latin typeface="Calibri"/>
+                        </a:defRPr>
                       </a:pPr>
+                      <a:r>
+                        <a:t>oneconcern.com</a:t>
+                      </a:r>
+                      <a:endParaRPr lang="en-US" sz="1600" dirty="0">
+                        <a:solidFill>
+                          <a:srgbClr val="FF0000"/>
+                        </a:solidFill>
+                        <a:latin typeface="Calibri" charset="0"/>
+                        <a:ea typeface="Calibri" charset="0"/>
+                        <a:cs typeface="Calibri" charset="0"/>
+                      </a:endParaRPr>
+                    </a:p>
+                  </a:txBody>
+                  <a:tcPr anchor="ctr">
+                    <a:lnL w="9525" cap="flat" cmpd="sng" algn="ctr">
+                      <a:solidFill>
+                        <a:srgbClr val="D7DCEA"/>
+                      </a:solidFill>
+                      <a:prstDash val="solid"/>
+                      <a:round/>
+                      <a:headEnd type="none" w="med" len="med"/>
+                      <a:tailEnd type="none" w="med" len="med"/>
+                    </a:lnL>
+                    <a:lnR w="9525" cap="flat" cmpd="sng" algn="ctr">
+                      <a:solidFill>
+                        <a:srgbClr val="D7DCEA"/>
+                      </a:solidFill>
+                      <a:prstDash val="solid"/>
+                      <a:round/>
+                      <a:headEnd type="none" w="med" len="med"/>
+                      <a:tailEnd type="none" w="med" len="med"/>
+                    </a:lnR>
+                    <a:lnT w="9525" cap="flat" cmpd="sng" algn="ctr">
+                      <a:solidFill>
+                        <a:srgbClr val="D7DCEA"/>
+                      </a:solidFill>
+                      <a:prstDash val="solid"/>
+                      <a:round/>
+                      <a:headEnd type="none" w="med" len="med"/>
+                      <a:tailEnd type="none" w="med" len="med"/>
+                    </a:lnT>
+                    <a:lnB w="9525" cap="flat" cmpd="sng" algn="ctr">
+                      <a:solidFill>
+                        <a:srgbClr val="D7DCEA"/>
+                      </a:solidFill>
+                      <a:prstDash val="solid"/>
+                      <a:round/>
+                      <a:headEnd type="none" w="med" len="med"/>
+                      <a:tailEnd type="none" w="med" len="med"/>
+                    </a:lnB>
+                    <a:solidFill>
+                      <a:srgbClr val="FFFFFF"/>
+                    </a:solidFill>
+                  </a:tcPr>
+                </a:tc>
+                <a:tc>
+                  <a:txBody>
+                    <a:bodyPr wrap="square"/>
+                    <a:lstStyle/>
+                    <a:p>
+                      <a:pPr marL="0" indent="0" algn="l">
+                        <a:buNone/>
+                        <a:defRPr sz="900" b="0" i="0">
+                          <a:solidFill>
+                            <a:srgbClr val="334155"/>
+                          </a:solidFill>
+                          <a:latin typeface="Calibri"/>
+                        </a:defRPr>
+                      </a:pPr>
+                      <a:r>
+                        <a:t>• Generates AI-driven digital twins of cities.</a:t>
+                      </a:r>
+                      <a:endParaRPr lang="en-US" sz="1600" dirty="0">
+                        <a:solidFill>
+                          <a:srgbClr val="FF0000"/>
+                        </a:solidFill>
+                        <a:latin typeface="Calibri" charset="0"/>
+                        <a:ea typeface="Calibri" charset="0"/>
+                        <a:cs typeface="Calibri" charset="0"/>
+                      </a:endParaRPr>
+                    </a:p>
+                    <a:p>
+                      <a:pPr algn="l">
+                        <a:defRPr sz="900" b="0" i="0">
+                          <a:solidFill>
+                            <a:srgbClr val="334155"/>
+                          </a:solidFill>
+                          <a:latin typeface="Calibri"/>
+                        </a:defRPr>
+                      </a:pPr>
+                      <a:r>
+                        <a:t>• Predicts natural hazard impact &amp; infrastructure vulnerability.</a:t>
+                      </a:r>
+                    </a:p>
+                  </a:txBody>
+                  <a:tcPr anchor="ctr">
+                    <a:lnL w="9525" cap="flat" cmpd="sng" algn="ctr">
+                      <a:solidFill>
+                        <a:srgbClr val="D7DCEA"/>
+                      </a:solidFill>
+                      <a:prstDash val="solid"/>
+                      <a:round/>
+                      <a:headEnd type="none" w="med" len="med"/>
+                      <a:tailEnd type="none" w="med" len="med"/>
+                    </a:lnL>
+                    <a:lnR w="9525" cap="flat" cmpd="sng" algn="ctr">
+                      <a:solidFill>
+                        <a:srgbClr val="D7DCEA"/>
+                      </a:solidFill>
+                      <a:prstDash val="solid"/>
+                      <a:round/>
+                      <a:headEnd type="none" w="med" len="med"/>
+                      <a:tailEnd type="none" w="med" len="med"/>
+                    </a:lnR>
+                    <a:lnT w="9525" cap="flat" cmpd="sng" algn="ctr">
+                      <a:solidFill>
+                        <a:srgbClr val="D7DCEA"/>
+                      </a:solidFill>
+                      <a:prstDash val="solid"/>
+                      <a:round/>
+                      <a:headEnd type="none" w="med" len="med"/>
+                      <a:tailEnd type="none" w="med" len="med"/>
+                    </a:lnT>
+                    <a:lnB w="9525" cap="flat" cmpd="sng" algn="ctr">
+                      <a:solidFill>
+                        <a:srgbClr val="D7DCEA"/>
+                      </a:solidFill>
+                      <a:prstDash val="solid"/>
+                      <a:round/>
+                      <a:headEnd type="none" w="med" len="med"/>
+                      <a:tailEnd type="none" w="med" len="med"/>
+                    </a:lnB>
+                    <a:solidFill>
+                      <a:srgbClr val="FFFFFF"/>
+                    </a:solidFill>
+                  </a:tcPr>
+                </a:tc>
+                <a:tc>
+                  <a:txBody>
+                    <a:bodyPr wrap="square"/>
+                    <a:lstStyle/>
+                    <a:p>
+                      <a:pPr marL="0" indent="0" algn="l">
+                        <a:buNone/>
+                        <a:defRPr sz="900" b="0" i="0">
+                          <a:solidFill>
+                            <a:srgbClr val="B91C1C"/>
+                          </a:solidFill>
+                          <a:latin typeface="Calibri"/>
+                        </a:defRPr>
+                      </a:pPr>
+                      <a:r>
+                        <a:t>• Purely predictive risk modeling.</a:t>
+                      </a:r>
+                      <a:endParaRPr lang="en-US" sz="1600" dirty="0">
+                        <a:solidFill>
+                          <a:srgbClr val="FF0000"/>
+                        </a:solidFill>
+                        <a:latin typeface="Calibri" charset="0"/>
+                        <a:ea typeface="Calibri" charset="0"/>
+                        <a:cs typeface="Calibri" charset="0"/>
+                      </a:endParaRPr>
+                    </a:p>
+                    <a:p>
+                      <a:pPr algn="l">
+                        <a:defRPr sz="900" b="0" i="0">
+                          <a:solidFill>
+                            <a:srgbClr val="B91C1C"/>
+                          </a:solidFill>
+                          <a:latin typeface="Calibri"/>
+                        </a:defRPr>
+                      </a:pPr>
+                      <a:r>
+                        <a:t>• Lacks generative camp layout synthesis for post-disaster recovery.</a:t>
+                      </a:r>
+                    </a:p>
+                  </a:txBody>
+                  <a:tcPr anchor="ctr">
+                    <a:lnL w="9525" cap="flat" cmpd="sng" algn="ctr">
+                      <a:solidFill>
+                        <a:srgbClr val="D7DCEA"/>
+                      </a:solidFill>
+                      <a:prstDash val="solid"/>
+                      <a:round/>
+                      <a:headEnd type="none" w="med" len="med"/>
+                      <a:tailEnd type="none" w="med" len="med"/>
+                    </a:lnL>
+                    <a:lnR w="9525" cap="flat" cmpd="sng" algn="ctr">
+                      <a:solidFill>
+                        <a:srgbClr val="D7DCEA"/>
+                      </a:solidFill>
+                      <a:prstDash val="solid"/>
+                      <a:round/>
+                      <a:headEnd type="none" w="med" len="med"/>
+                      <a:tailEnd type="none" w="med" len="med"/>
+                    </a:lnR>
+                    <a:lnT w="9525" cap="flat" cmpd="sng" algn="ctr">
+                      <a:solidFill>
+                        <a:srgbClr val="D7DCEA"/>
+                      </a:solidFill>
+                      <a:prstDash val="solid"/>
+                      <a:round/>
+                      <a:headEnd type="none" w="med" len="med"/>
+                      <a:tailEnd type="none" w="med" len="med"/>
+                    </a:lnT>
+                    <a:lnB w="9525" cap="flat" cmpd="sng" algn="ctr">
+                      <a:solidFill>
+                        <a:srgbClr val="D7DCEA"/>
+                      </a:solidFill>
+                      <a:prstDash val="solid"/>
+                      <a:round/>
+                      <a:headEnd type="none" w="med" len="med"/>
+                      <a:tailEnd type="none" w="med" len="med"/>
+                    </a:lnB>
+                    <a:solidFill>
+                      <a:srgbClr val="FFFFFF"/>
+                    </a:solidFill>
+                  </a:tcPr>
+                </a:tc>
+                <a:extLst>
+                  <a:ext uri="{0D108BD9-81ED-4DB2-BD59-A6C34878D82A}">
+                    <a16:rowId xmlns:a16="http://schemas.microsoft.com/office/drawing/2014/main" val="10001"/>
+                  </a:ext>
+                </a:extLst>
+              </a:tr>
+              <a:tr h="914400">
+                <a:tc>
+                  <a:txBody>
+                    <a:bodyPr/>
+                    <a:lstStyle/>
+                    <a:p>
+                      <a:pPr marL="0" indent="0" algn="l">
+                        <a:buNone/>
+                        <a:defRPr sz="1000" b="1" i="0">
+                          <a:solidFill>
+                            <a:srgbClr val="0F172A"/>
+                          </a:solidFill>
+                          <a:latin typeface="Calibri"/>
+                        </a:defRPr>
+                      </a:pPr>
+                      <a:r>
+                        <a:t>HOT Tasking Manager</a:t>
+                      </a:r>
                       <a:endParaRPr lang="en-US" sz="1600" dirty="0">
                         <a:solidFill>
                           <a:srgbClr val="FF0000"/>
@@ -40620,7 +41103,256 @@
                     <a:p>
                       <a:pPr marL="0" indent="0" algn="l">
                         <a:buNone/>
+                        <a:defRPr sz="900" b="0" i="0">
+                          <a:solidFill>
+                            <a:srgbClr val="2563EB"/>
+                          </a:solidFill>
+                          <a:latin typeface="Calibri"/>
+                        </a:defRPr>
                       </a:pPr>
+                      <a:r>
+                        <a:t>tasks.hotosm.org</a:t>
+                      </a:r>
+                      <a:endParaRPr lang="en-US" sz="1600" dirty="0">
+                        <a:solidFill>
+                          <a:srgbClr val="FF0000"/>
+                        </a:solidFill>
+                        <a:latin typeface="Calibri" charset="0"/>
+                        <a:ea typeface="Calibri" charset="0"/>
+                        <a:cs typeface="Calibri" charset="0"/>
+                      </a:endParaRPr>
+                    </a:p>
+                  </a:txBody>
+                  <a:tcPr anchor="ctr">
+                    <a:lnL w="9525" cap="flat" cmpd="sng" algn="ctr">
+                      <a:solidFill>
+                        <a:srgbClr val="D7DCEA"/>
+                      </a:solidFill>
+                      <a:prstDash val="solid"/>
+                      <a:round/>
+                      <a:headEnd type="none" w="med" len="med"/>
+                      <a:tailEnd type="none" w="med" len="med"/>
+                    </a:lnL>
+                    <a:lnR w="9525" cap="flat" cmpd="sng" algn="ctr">
+                      <a:solidFill>
+                        <a:srgbClr val="D7DCEA"/>
+                      </a:solidFill>
+                      <a:prstDash val="solid"/>
+                      <a:round/>
+                      <a:headEnd type="none" w="med" len="med"/>
+                      <a:tailEnd type="none" w="med" len="med"/>
+                    </a:lnR>
+                    <a:lnT w="9525" cap="flat" cmpd="sng" algn="ctr">
+                      <a:solidFill>
+                        <a:srgbClr val="D7DCEA"/>
+                      </a:solidFill>
+                      <a:prstDash val="solid"/>
+                      <a:round/>
+                      <a:headEnd type="none" w="med" len="med"/>
+                      <a:tailEnd type="none" w="med" len="med"/>
+                    </a:lnT>
+                    <a:lnB w="9525" cap="flat" cmpd="sng" algn="ctr">
+                      <a:solidFill>
+                        <a:srgbClr val="D7DCEA"/>
+                      </a:solidFill>
+                      <a:prstDash val="solid"/>
+                      <a:round/>
+                      <a:headEnd type="none" w="med" len="med"/>
+                      <a:tailEnd type="none" w="med" len="med"/>
+                    </a:lnB>
+                    <a:solidFill>
+                      <a:srgbClr val="FFFFFF"/>
+                    </a:solidFill>
+                  </a:tcPr>
+                </a:tc>
+                <a:tc>
+                  <a:txBody>
+                    <a:bodyPr wrap="square"/>
+                    <a:lstStyle/>
+                    <a:p>
+                      <a:pPr marL="0" indent="0" algn="l">
+                        <a:buNone/>
+                        <a:defRPr sz="900" b="0" i="0">
+                          <a:solidFill>
+                            <a:srgbClr val="334155"/>
+                          </a:solidFill>
+                          <a:latin typeface="Calibri"/>
+                        </a:defRPr>
+                      </a:pPr>
+                      <a:r>
+                        <a:t>• Global crowdsourced mapping coordination.</a:t>
+                      </a:r>
+                      <a:endParaRPr lang="en-US" sz="1600" dirty="0">
+                        <a:solidFill>
+                          <a:srgbClr val="FF0000"/>
+                        </a:solidFill>
+                        <a:latin typeface="Calibri" charset="0"/>
+                        <a:ea typeface="Calibri" charset="0"/>
+                        <a:cs typeface="Calibri" charset="0"/>
+                      </a:endParaRPr>
+                    </a:p>
+                    <a:p>
+                      <a:pPr algn="l">
+                        <a:defRPr sz="900" b="0" i="0">
+                          <a:solidFill>
+                            <a:srgbClr val="334155"/>
+                          </a:solidFill>
+                          <a:latin typeface="Calibri"/>
+                        </a:defRPr>
+                      </a:pPr>
+                      <a:r>
+                        <a:t>• Organizes remote volunteers to trace roads &amp; buildings.</a:t>
+                      </a:r>
+                    </a:p>
+                  </a:txBody>
+                  <a:tcPr anchor="ctr">
+                    <a:lnL w="9525" cap="flat" cmpd="sng" algn="ctr">
+                      <a:solidFill>
+                        <a:srgbClr val="D7DCEA"/>
+                      </a:solidFill>
+                      <a:prstDash val="solid"/>
+                      <a:round/>
+                      <a:headEnd type="none" w="med" len="med"/>
+                      <a:tailEnd type="none" w="med" len="med"/>
+                    </a:lnL>
+                    <a:lnR w="9525" cap="flat" cmpd="sng" algn="ctr">
+                      <a:solidFill>
+                        <a:srgbClr val="D7DCEA"/>
+                      </a:solidFill>
+                      <a:prstDash val="solid"/>
+                      <a:round/>
+                      <a:headEnd type="none" w="med" len="med"/>
+                      <a:tailEnd type="none" w="med" len="med"/>
+                    </a:lnR>
+                    <a:lnT w="9525" cap="flat" cmpd="sng" algn="ctr">
+                      <a:solidFill>
+                        <a:srgbClr val="D7DCEA"/>
+                      </a:solidFill>
+                      <a:prstDash val="solid"/>
+                      <a:round/>
+                      <a:headEnd type="none" w="med" len="med"/>
+                      <a:tailEnd type="none" w="med" len="med"/>
+                    </a:lnT>
+                    <a:lnB w="9525" cap="flat" cmpd="sng" algn="ctr">
+                      <a:solidFill>
+                        <a:srgbClr val="D7DCEA"/>
+                      </a:solidFill>
+                      <a:prstDash val="solid"/>
+                      <a:round/>
+                      <a:headEnd type="none" w="med" len="med"/>
+                      <a:tailEnd type="none" w="med" len="med"/>
+                    </a:lnB>
+                    <a:solidFill>
+                      <a:srgbClr val="FFFFFF"/>
+                    </a:solidFill>
+                  </a:tcPr>
+                </a:tc>
+                <a:tc>
+                  <a:txBody>
+                    <a:bodyPr wrap="square"/>
+                    <a:lstStyle/>
+                    <a:p>
+                      <a:pPr marL="0" indent="0" algn="l">
+                        <a:buNone/>
+                        <a:defRPr sz="900" b="0" i="0">
+                          <a:solidFill>
+                            <a:srgbClr val="B91C1C"/>
+                          </a:solidFill>
+                          <a:latin typeface="Calibri"/>
+                        </a:defRPr>
+                      </a:pPr>
+                      <a:r>
+                        <a:t>• Highly manual and slow (takes days/weeks).</a:t>
+                      </a:r>
+                      <a:endParaRPr lang="en-US" sz="1600" dirty="0">
+                        <a:solidFill>
+                          <a:srgbClr val="FF0000"/>
+                        </a:solidFill>
+                        <a:latin typeface="Calibri" charset="0"/>
+                        <a:ea typeface="Calibri" charset="0"/>
+                        <a:cs typeface="Calibri" charset="0"/>
+                      </a:endParaRPr>
+                    </a:p>
+                    <a:p>
+                      <a:pPr algn="l">
+                        <a:defRPr sz="900" b="0" i="0">
+                          <a:solidFill>
+                            <a:srgbClr val="B91C1C"/>
+                          </a:solidFill>
+                          <a:latin typeface="Calibri"/>
+                        </a:defRPr>
+                      </a:pPr>
+                      <a:r>
+                        <a:t>• Relies on volunteer availability; no automated blueprint generation.</a:t>
+                      </a:r>
+                    </a:p>
+                  </a:txBody>
+                  <a:tcPr anchor="ctr">
+                    <a:lnL w="9525" cap="flat" cmpd="sng" algn="ctr">
+                      <a:solidFill>
+                        <a:srgbClr val="D7DCEA"/>
+                      </a:solidFill>
+                      <a:prstDash val="solid"/>
+                      <a:round/>
+                      <a:headEnd type="none" w="med" len="med"/>
+                      <a:tailEnd type="none" w="med" len="med"/>
+                    </a:lnL>
+                    <a:lnR w="9525" cap="flat" cmpd="sng" algn="ctr">
+                      <a:solidFill>
+                        <a:srgbClr val="D7DCEA"/>
+                      </a:solidFill>
+                      <a:prstDash val="solid"/>
+                      <a:round/>
+                      <a:headEnd type="none" w="med" len="med"/>
+                      <a:tailEnd type="none" w="med" len="med"/>
+                    </a:lnR>
+                    <a:lnT w="9525" cap="flat" cmpd="sng" algn="ctr">
+                      <a:solidFill>
+                        <a:srgbClr val="D7DCEA"/>
+                      </a:solidFill>
+                      <a:prstDash val="solid"/>
+                      <a:round/>
+                      <a:headEnd type="none" w="med" len="med"/>
+                      <a:tailEnd type="none" w="med" len="med"/>
+                    </a:lnT>
+                    <a:lnB w="9525" cap="flat" cmpd="sng" algn="ctr">
+                      <a:solidFill>
+                        <a:srgbClr val="D7DCEA"/>
+                      </a:solidFill>
+                      <a:prstDash val="solid"/>
+                      <a:round/>
+                      <a:headEnd type="none" w="med" len="med"/>
+                      <a:tailEnd type="none" w="med" len="med"/>
+                    </a:lnB>
+                    <a:solidFill>
+                      <a:srgbClr val="FFFFFF"/>
+                    </a:solidFill>
+                  </a:tcPr>
+                </a:tc>
+                <a:extLst>
+                  <a:ext uri="{0D108BD9-81ED-4DB2-BD59-A6C34878D82A}">
+                    <a16:rowId xmlns:a16="http://schemas.microsoft.com/office/drawing/2014/main" val="10002"/>
+                  </a:ext>
+                </a:extLst>
+              </a:tr>
+              <a:tr h="914400">
+                <a:tc>
+                  <a:txBody>
+                    <a:bodyPr/>
+                    <a:lstStyle/>
+                    <a:p>
+                      <a:pPr marL="0" indent="0" algn="l">
+                        <a:buNone/>
+                        <a:defRPr sz="1000" b="1" i="0">
+                          <a:solidFill>
+                            <a:srgbClr val="0F172A"/>
+                          </a:solidFill>
+                          <a:latin typeface="Calibri"/>
+                        </a:defRPr>
+                      </a:pPr>
+                      <a:r>
+                        <a:t>UNHCR GIS Data Portal</a:t>
+                      </a:r>
                       <a:endParaRPr lang="en-US" sz="1600" dirty="0">
                         <a:solidFill>
                           <a:srgbClr val="FF0000"/>
@@ -40680,74 +41412,16 @@
                     <a:p>
                       <a:pPr marL="0" indent="0" algn="l">
                         <a:buNone/>
+                        <a:defRPr sz="900" b="0" i="0">
+                          <a:solidFill>
+                            <a:srgbClr val="2563EB"/>
+                          </a:solidFill>
+                          <a:latin typeface="Calibri"/>
+                        </a:defRPr>
                       </a:pPr>
-                      <a:endParaRPr lang="en-US" sz="1600" dirty="0">
-                        <a:solidFill>
-                          <a:srgbClr val="FF0000"/>
-                        </a:solidFill>
-                        <a:latin typeface="Calibri" charset="0"/>
-                        <a:ea typeface="Calibri" charset="0"/>
-                        <a:cs typeface="Calibri" charset="0"/>
-                      </a:endParaRPr>
-                    </a:p>
-                  </a:txBody>
-                  <a:tcPr anchor="ctr">
-                    <a:lnL w="9525" cap="flat" cmpd="sng" algn="ctr">
-                      <a:solidFill>
-                        <a:srgbClr val="D7DCEA"/>
-                      </a:solidFill>
-                      <a:prstDash val="solid"/>
-                      <a:round/>
-                      <a:headEnd type="none" w="med" len="med"/>
-                      <a:tailEnd type="none" w="med" len="med"/>
-                    </a:lnL>
-                    <a:lnR w="9525" cap="flat" cmpd="sng" algn="ctr">
-                      <a:solidFill>
-                        <a:srgbClr val="D7DCEA"/>
-                      </a:solidFill>
-                      <a:prstDash val="solid"/>
-                      <a:round/>
-                      <a:headEnd type="none" w="med" len="med"/>
-                      <a:tailEnd type="none" w="med" len="med"/>
-                    </a:lnR>
-                    <a:lnT w="9525" cap="flat" cmpd="sng" algn="ctr">
-                      <a:solidFill>
-                        <a:srgbClr val="D7DCEA"/>
-                      </a:solidFill>
-                      <a:prstDash val="solid"/>
-                      <a:round/>
-                      <a:headEnd type="none" w="med" len="med"/>
-                      <a:tailEnd type="none" w="med" len="med"/>
-                    </a:lnT>
-                    <a:lnB w="9525" cap="flat" cmpd="sng" algn="ctr">
-                      <a:solidFill>
-                        <a:srgbClr val="D7DCEA"/>
-                      </a:solidFill>
-                      <a:prstDash val="solid"/>
-                      <a:round/>
-                      <a:headEnd type="none" w="med" len="med"/>
-                      <a:tailEnd type="none" w="med" len="med"/>
-                    </a:lnB>
-                    <a:solidFill>
-                      <a:srgbClr val="FFFFFF"/>
-                    </a:solidFill>
-                  </a:tcPr>
-                </a:tc>
-                <a:extLst>
-                  <a:ext uri="{0D108BD9-81ED-4DB2-BD59-A6C34878D82A}">
-                    <a16:rowId xmlns:a16="http://schemas.microsoft.com/office/drawing/2014/main" val="10001"/>
-                  </a:ext>
-                </a:extLst>
-              </a:tr>
-              <a:tr h="914400">
-                <a:tc>
-                  <a:txBody>
-                    <a:bodyPr/>
-                    <a:lstStyle/>
-                    <a:p>
-                      <a:pPr marL="0" indent="0" algn="l">
-                        <a:buNone/>
-                      </a:pPr>
+                      <a:r>
+                        <a:t>data.unhcr.org</a:t>
+                      </a:r>
                       <a:endParaRPr lang="en-US" sz="1600" dirty="0">
                         <a:solidFill>
                           <a:srgbClr val="FF0000"/>
@@ -40802,12 +41476,21 @@
                 </a:tc>
                 <a:tc>
                   <a:txBody>
-                    <a:bodyPr/>
+                    <a:bodyPr wrap="square"/>
                     <a:lstStyle/>
                     <a:p>
                       <a:pPr marL="0" indent="0" algn="l">
                         <a:buNone/>
+                        <a:defRPr sz="900" b="0" i="0">
+                          <a:solidFill>
+                            <a:srgbClr val="334155"/>
+                          </a:solidFill>
+                          <a:latin typeface="Calibri"/>
+                        </a:defRPr>
                       </a:pPr>
+                      <a:r>
+                        <a:t>• Centralized UN repository of established refugee camps.</a:t>
+                      </a:r>
                       <a:endParaRPr lang="en-US" sz="1600" dirty="0">
                         <a:solidFill>
                           <a:srgbClr val="FF0000"/>
@@ -40816,6 +41499,19 @@
                         <a:ea typeface="Calibri" charset="0"/>
                         <a:cs typeface="Calibri" charset="0"/>
                       </a:endParaRPr>
+                    </a:p>
+                    <a:p>
+                      <a:pPr algn="l">
+                        <a:defRPr sz="900" b="0" i="0">
+                          <a:solidFill>
+                            <a:srgbClr val="334155"/>
+                          </a:solidFill>
+                          <a:latin typeface="Calibri"/>
+                        </a:defRPr>
+                      </a:pPr>
+                      <a:r>
+                        <a:t>• Provides static demographic maps and PDF reports.</a:t>
+                      </a:r>
                     </a:p>
                   </a:txBody>
                   <a:tcPr anchor="ctr">
@@ -40862,12 +41558,21 @@
                 </a:tc>
                 <a:tc>
                   <a:txBody>
-                    <a:bodyPr/>
+                    <a:bodyPr wrap="square"/>
                     <a:lstStyle/>
                     <a:p>
                       <a:pPr marL="0" indent="0" algn="l">
                         <a:buNone/>
+                        <a:defRPr sz="900" b="0" i="0">
+                          <a:solidFill>
+                            <a:srgbClr val="B91C1C"/>
+                          </a:solidFill>
+                          <a:latin typeface="Calibri"/>
+                        </a:defRPr>
                       </a:pPr>
+                      <a:r>
+                        <a:t>• Purely static archival catalog.</a:t>
+                      </a:r>
                       <a:endParaRPr lang="en-US" sz="1600" dirty="0">
                         <a:solidFill>
                           <a:srgbClr val="FF0000"/>
@@ -40877,312 +41582,18 @@
                         <a:cs typeface="Calibri" charset="0"/>
                       </a:endParaRPr>
                     </a:p>
-                  </a:txBody>
-                  <a:tcPr anchor="ctr">
-                    <a:lnL w="9525" cap="flat" cmpd="sng" algn="ctr">
-                      <a:solidFill>
-                        <a:srgbClr val="D7DCEA"/>
-                      </a:solidFill>
-                      <a:prstDash val="solid"/>
-                      <a:round/>
-                      <a:headEnd type="none" w="med" len="med"/>
-                      <a:tailEnd type="none" w="med" len="med"/>
-                    </a:lnL>
-                    <a:lnR w="9525" cap="flat" cmpd="sng" algn="ctr">
-                      <a:solidFill>
-                        <a:srgbClr val="D7DCEA"/>
-                      </a:solidFill>
-                      <a:prstDash val="solid"/>
-                      <a:round/>
-                      <a:headEnd type="none" w="med" len="med"/>
-                      <a:tailEnd type="none" w="med" len="med"/>
-                    </a:lnR>
-                    <a:lnT w="9525" cap="flat" cmpd="sng" algn="ctr">
-                      <a:solidFill>
-                        <a:srgbClr val="D7DCEA"/>
-                      </a:solidFill>
-                      <a:prstDash val="solid"/>
-                      <a:round/>
-                      <a:headEnd type="none" w="med" len="med"/>
-                      <a:tailEnd type="none" w="med" len="med"/>
-                    </a:lnT>
-                    <a:lnB w="9525" cap="flat" cmpd="sng" algn="ctr">
-                      <a:solidFill>
-                        <a:srgbClr val="D7DCEA"/>
-                      </a:solidFill>
-                      <a:prstDash val="solid"/>
-                      <a:round/>
-                      <a:headEnd type="none" w="med" len="med"/>
-                      <a:tailEnd type="none" w="med" len="med"/>
-                    </a:lnB>
-                    <a:solidFill>
-                      <a:srgbClr val="FFFFFF"/>
-                    </a:solidFill>
-                  </a:tcPr>
-                </a:tc>
-                <a:tc>
-                  <a:txBody>
-                    <a:bodyPr/>
-                    <a:lstStyle/>
                     <a:p>
-                      <a:pPr marL="0" indent="0" algn="l">
-                        <a:buNone/>
+                      <a:pPr algn="l">
+                        <a:defRPr sz="900" b="0" i="0">
+                          <a:solidFill>
+                            <a:srgbClr val="B91C1C"/>
+                          </a:solidFill>
+                          <a:latin typeface="Calibri"/>
+                        </a:defRPr>
                       </a:pPr>
-                      <a:endParaRPr lang="en-US" sz="1600" dirty="0">
-                        <a:solidFill>
-                          <a:srgbClr val="FF0000"/>
-                        </a:solidFill>
-                        <a:latin typeface="Calibri" charset="0"/>
-                        <a:ea typeface="Calibri" charset="0"/>
-                        <a:cs typeface="Calibri" charset="0"/>
-                      </a:endParaRPr>
-                    </a:p>
-                  </a:txBody>
-                  <a:tcPr anchor="ctr">
-                    <a:lnL w="9525" cap="flat" cmpd="sng" algn="ctr">
-                      <a:solidFill>
-                        <a:srgbClr val="D7DCEA"/>
-                      </a:solidFill>
-                      <a:prstDash val="solid"/>
-                      <a:round/>
-                      <a:headEnd type="none" w="med" len="med"/>
-                      <a:tailEnd type="none" w="med" len="med"/>
-                    </a:lnL>
-                    <a:lnR w="9525" cap="flat" cmpd="sng" algn="ctr">
-                      <a:solidFill>
-                        <a:srgbClr val="D7DCEA"/>
-                      </a:solidFill>
-                      <a:prstDash val="solid"/>
-                      <a:round/>
-                      <a:headEnd type="none" w="med" len="med"/>
-                      <a:tailEnd type="none" w="med" len="med"/>
-                    </a:lnR>
-                    <a:lnT w="9525" cap="flat" cmpd="sng" algn="ctr">
-                      <a:solidFill>
-                        <a:srgbClr val="D7DCEA"/>
-                      </a:solidFill>
-                      <a:prstDash val="solid"/>
-                      <a:round/>
-                      <a:headEnd type="none" w="med" len="med"/>
-                      <a:tailEnd type="none" w="med" len="med"/>
-                    </a:lnT>
-                    <a:lnB w="9525" cap="flat" cmpd="sng" algn="ctr">
-                      <a:solidFill>
-                        <a:srgbClr val="D7DCEA"/>
-                      </a:solidFill>
-                      <a:prstDash val="solid"/>
-                      <a:round/>
-                      <a:headEnd type="none" w="med" len="med"/>
-                      <a:tailEnd type="none" w="med" len="med"/>
-                    </a:lnB>
-                    <a:solidFill>
-                      <a:srgbClr val="FFFFFF"/>
-                    </a:solidFill>
-                  </a:tcPr>
-                </a:tc>
-                <a:extLst>
-                  <a:ext uri="{0D108BD9-81ED-4DB2-BD59-A6C34878D82A}">
-                    <a16:rowId xmlns:a16="http://schemas.microsoft.com/office/drawing/2014/main" val="10002"/>
-                  </a:ext>
-                </a:extLst>
-              </a:tr>
-              <a:tr h="914400">
-                <a:tc>
-                  <a:txBody>
-                    <a:bodyPr/>
-                    <a:lstStyle/>
-                    <a:p>
-                      <a:pPr marL="0" indent="0" algn="l">
-                        <a:buNone/>
-                      </a:pPr>
-                      <a:endParaRPr lang="en-US" sz="1600" dirty="0">
-                        <a:solidFill>
-                          <a:srgbClr val="FF0000"/>
-                        </a:solidFill>
-                        <a:latin typeface="Calibri" charset="0"/>
-                        <a:ea typeface="Calibri" charset="0"/>
-                        <a:cs typeface="Calibri" charset="0"/>
-                      </a:endParaRPr>
-                    </a:p>
-                  </a:txBody>
-                  <a:tcPr anchor="ctr">
-                    <a:lnL w="9525" cap="flat" cmpd="sng" algn="ctr">
-                      <a:solidFill>
-                        <a:srgbClr val="D7DCEA"/>
-                      </a:solidFill>
-                      <a:prstDash val="solid"/>
-                      <a:round/>
-                      <a:headEnd type="none" w="med" len="med"/>
-                      <a:tailEnd type="none" w="med" len="med"/>
-                    </a:lnL>
-                    <a:lnR w="9525" cap="flat" cmpd="sng" algn="ctr">
-                      <a:solidFill>
-                        <a:srgbClr val="D7DCEA"/>
-                      </a:solidFill>
-                      <a:prstDash val="solid"/>
-                      <a:round/>
-                      <a:headEnd type="none" w="med" len="med"/>
-                      <a:tailEnd type="none" w="med" len="med"/>
-                    </a:lnR>
-                    <a:lnT w="9525" cap="flat" cmpd="sng" algn="ctr">
-                      <a:solidFill>
-                        <a:srgbClr val="D7DCEA"/>
-                      </a:solidFill>
-                      <a:prstDash val="solid"/>
-                      <a:round/>
-                      <a:headEnd type="none" w="med" len="med"/>
-                      <a:tailEnd type="none" w="med" len="med"/>
-                    </a:lnT>
-                    <a:lnB w="9525" cap="flat" cmpd="sng" algn="ctr">
-                      <a:solidFill>
-                        <a:srgbClr val="D7DCEA"/>
-                      </a:solidFill>
-                      <a:prstDash val="solid"/>
-                      <a:round/>
-                      <a:headEnd type="none" w="med" len="med"/>
-                      <a:tailEnd type="none" w="med" len="med"/>
-                    </a:lnB>
-                    <a:solidFill>
-                      <a:srgbClr val="FFFFFF"/>
-                    </a:solidFill>
-                  </a:tcPr>
-                </a:tc>
-                <a:tc>
-                  <a:txBody>
-                    <a:bodyPr/>
-                    <a:lstStyle/>
-                    <a:p>
-                      <a:pPr marL="0" indent="0" algn="l">
-                        <a:buNone/>
-                      </a:pPr>
-                      <a:endParaRPr lang="en-US" sz="1600" dirty="0">
-                        <a:solidFill>
-                          <a:srgbClr val="FF0000"/>
-                        </a:solidFill>
-                        <a:latin typeface="Calibri" charset="0"/>
-                        <a:ea typeface="Calibri" charset="0"/>
-                        <a:cs typeface="Calibri" charset="0"/>
-                      </a:endParaRPr>
-                    </a:p>
-                  </a:txBody>
-                  <a:tcPr anchor="ctr">
-                    <a:lnL w="9525" cap="flat" cmpd="sng" algn="ctr">
-                      <a:solidFill>
-                        <a:srgbClr val="D7DCEA"/>
-                      </a:solidFill>
-                      <a:prstDash val="solid"/>
-                      <a:round/>
-                      <a:headEnd type="none" w="med" len="med"/>
-                      <a:tailEnd type="none" w="med" len="med"/>
-                    </a:lnL>
-                    <a:lnR w="9525" cap="flat" cmpd="sng" algn="ctr">
-                      <a:solidFill>
-                        <a:srgbClr val="D7DCEA"/>
-                      </a:solidFill>
-                      <a:prstDash val="solid"/>
-                      <a:round/>
-                      <a:headEnd type="none" w="med" len="med"/>
-                      <a:tailEnd type="none" w="med" len="med"/>
-                    </a:lnR>
-                    <a:lnT w="9525" cap="flat" cmpd="sng" algn="ctr">
-                      <a:solidFill>
-                        <a:srgbClr val="D7DCEA"/>
-                      </a:solidFill>
-                      <a:prstDash val="solid"/>
-                      <a:round/>
-                      <a:headEnd type="none" w="med" len="med"/>
-                      <a:tailEnd type="none" w="med" len="med"/>
-                    </a:lnT>
-                    <a:lnB w="9525" cap="flat" cmpd="sng" algn="ctr">
-                      <a:solidFill>
-                        <a:srgbClr val="D7DCEA"/>
-                      </a:solidFill>
-                      <a:prstDash val="solid"/>
-                      <a:round/>
-                      <a:headEnd type="none" w="med" len="med"/>
-                      <a:tailEnd type="none" w="med" len="med"/>
-                    </a:lnB>
-                    <a:solidFill>
-                      <a:srgbClr val="FFFFFF"/>
-                    </a:solidFill>
-                  </a:tcPr>
-                </a:tc>
-                <a:tc>
-                  <a:txBody>
-                    <a:bodyPr/>
-                    <a:lstStyle/>
-                    <a:p>
-                      <a:pPr marL="0" indent="0" algn="l">
-                        <a:buNone/>
-                      </a:pPr>
-                      <a:endParaRPr lang="en-US" sz="1600" dirty="0">
-                        <a:solidFill>
-                          <a:srgbClr val="FF0000"/>
-                        </a:solidFill>
-                        <a:latin typeface="Calibri" charset="0"/>
-                        <a:ea typeface="Calibri" charset="0"/>
-                        <a:cs typeface="Calibri" charset="0"/>
-                      </a:endParaRPr>
-                    </a:p>
-                  </a:txBody>
-                  <a:tcPr anchor="ctr">
-                    <a:lnL w="9525" cap="flat" cmpd="sng" algn="ctr">
-                      <a:solidFill>
-                        <a:srgbClr val="D7DCEA"/>
-                      </a:solidFill>
-                      <a:prstDash val="solid"/>
-                      <a:round/>
-                      <a:headEnd type="none" w="med" len="med"/>
-                      <a:tailEnd type="none" w="med" len="med"/>
-                    </a:lnL>
-                    <a:lnR w="9525" cap="flat" cmpd="sng" algn="ctr">
-                      <a:solidFill>
-                        <a:srgbClr val="D7DCEA"/>
-                      </a:solidFill>
-                      <a:prstDash val="solid"/>
-                      <a:round/>
-                      <a:headEnd type="none" w="med" len="med"/>
-                      <a:tailEnd type="none" w="med" len="med"/>
-                    </a:lnR>
-                    <a:lnT w="9525" cap="flat" cmpd="sng" algn="ctr">
-                      <a:solidFill>
-                        <a:srgbClr val="D7DCEA"/>
-                      </a:solidFill>
-                      <a:prstDash val="solid"/>
-                      <a:round/>
-                      <a:headEnd type="none" w="med" len="med"/>
-                      <a:tailEnd type="none" w="med" len="med"/>
-                    </a:lnT>
-                    <a:lnB w="9525" cap="flat" cmpd="sng" algn="ctr">
-                      <a:solidFill>
-                        <a:srgbClr val="D7DCEA"/>
-                      </a:solidFill>
-                      <a:prstDash val="solid"/>
-                      <a:round/>
-                      <a:headEnd type="none" w="med" len="med"/>
-                      <a:tailEnd type="none" w="med" len="med"/>
-                    </a:lnB>
-                    <a:solidFill>
-                      <a:srgbClr val="FFFFFF"/>
-                    </a:solidFill>
-                  </a:tcPr>
-                </a:tc>
-                <a:tc>
-                  <a:txBody>
-                    <a:bodyPr/>
-                    <a:lstStyle/>
-                    <a:p>
-                      <a:pPr marL="0" indent="0" algn="l">
-                        <a:buNone/>
-                      </a:pPr>
-                      <a:endParaRPr lang="en-US" sz="1600" dirty="0">
-                        <a:solidFill>
-                          <a:srgbClr val="FF0000"/>
-                        </a:solidFill>
-                        <a:latin typeface="Calibri" charset="0"/>
-                        <a:ea typeface="Calibri" charset="0"/>
-                        <a:cs typeface="Calibri" charset="0"/>
-                      </a:endParaRPr>
+                      <a:r>
+                        <a:t>• Cannot autonomously design or optimize layout plans for new crisis ground.</a:t>
+                      </a:r>
                     </a:p>
                   </a:txBody>
                   <a:tcPr anchor="ctr">
@@ -41409,9 +41820,18 @@
           <a:bodyPr wrap="square" rtlCol="0" anchor="ctr"/>
           <a:lstStyle/>
           <a:p>
-            <a:pPr marL="0" indent="0">
-              <a:buNone/>
+            <a:pPr marL="0" indent="0" algn="l">
+              <a:buNone/>
+              <a:defRPr sz="1000" b="0" i="0">
+                <a:solidFill>
+                  <a:srgbClr val="334155"/>
+                </a:solidFill>
+                <a:latin typeface="Calibri"/>
+              </a:defRPr>
             </a:pPr>
+            <a:r>
+              <a:t>ReliefPlan AI is an autonomous geospatial intelligence and settlement planning platform for humanitarian emergencies. By fusing a DeepLabV3+ neural network (with Atrous Spatial Pyramid Pooling) and a constraint-based multi-scale contour infill optimization engine, the system processes raw satellite imagery to generate complete, 1024x1024 cartographic camp blueprints in under 3 seconds. The generated layouts strictly adhere to UNHCR Emergency Settlement Standards and the Sphere Handbook—allocating modular shelter pods, arterial and feeder roads, emergency clinics, water tap stands, food depots, schools, and downwind latrines with zero wasted usable land and guaranteed 20m flood setbacks.</a:t>
+            </a:r>
             <a:endParaRPr lang="en-US" sz="1800" dirty="0">
               <a:solidFill>
                 <a:srgbClr val="FF0000"/>
@@ -41597,14 +42017,49 @@
           <a:bodyPr wrap="square" rtlCol="0" anchor="ctr"/>
           <a:lstStyle/>
           <a:p>
-            <a:pPr marL="0" indent="0">
-              <a:buNone/>
+            <a:pPr marL="0" indent="0" algn="l">
+              <a:buNone/>
+              <a:defRPr sz="880" b="0" i="0">
+                <a:solidFill>
+                  <a:srgbClr val="334155"/>
+                </a:solidFill>
+                <a:latin typeface="Calibri"/>
+              </a:defRPr>
             </a:pPr>
+            <a:r>
+              <a:t>• DeepLabV3+ with ASPP (Atrous Spatial Pyramid Pooling) captures multi-scale geographical features simultaneously.</a:t>
+            </a:r>
             <a:endParaRPr lang="en-US" sz="1600" dirty="0">
               <a:solidFill>
                 <a:srgbClr val="FF0000"/>
               </a:solidFill>
             </a:endParaRPr>
+          </a:p>
+          <a:p>
+            <a:pPr algn="l">
+              <a:defRPr sz="880" b="0" i="0">
+                <a:solidFill>
+                  <a:srgbClr val="334155"/>
+                </a:solidFill>
+                <a:latin typeface="Calibri"/>
+              </a:defRPr>
+            </a:pPr>
+            <a:r>
+              <a:t>• Lightweight MobileNetV3 backbone: 3.9M parameters vs. 31M in U-Net (7.8x lighter &amp; 2.4x faster).</a:t>
+            </a:r>
+          </a:p>
+          <a:p>
+            <a:pPr algn="l">
+              <a:defRPr sz="880" b="0" i="0">
+                <a:solidFill>
+                  <a:srgbClr val="334155"/>
+                </a:solidFill>
+                <a:latin typeface="Calibri"/>
+              </a:defRPr>
+            </a:pPr>
+            <a:r>
+              <a:t>• 45% mIoU on LoveDA benchmark with real-time 394ms inference on GPU.</a:t>
+            </a:r>
           </a:p>
         </p:txBody>
       </p:sp>
@@ -41742,14 +42197,62 @@
           <a:bodyPr wrap="square" rtlCol="0" anchor="ctr"/>
           <a:lstStyle/>
           <a:p>
-            <a:pPr marL="0" indent="0">
-              <a:buNone/>
+            <a:pPr marL="0" indent="0" algn="l">
+              <a:buNone/>
+              <a:defRPr sz="880" b="0" i="0">
+                <a:solidFill>
+                  <a:srgbClr val="334155"/>
+                </a:solidFill>
+                <a:latin typeface="Calibri"/>
+              </a:defRPr>
             </a:pPr>
+            <a:r>
+              <a:t>• ReliefPlan AI: Full-stack humanitarian command center UI.</a:t>
+            </a:r>
             <a:endParaRPr lang="en-US" sz="1600" dirty="0">
               <a:solidFill>
                 <a:srgbClr val="FF0000"/>
               </a:solidFill>
             </a:endParaRPr>
+          </a:p>
+          <a:p>
+            <a:pPr algn="l">
+              <a:defRPr sz="880" b="0" i="0">
+                <a:solidFill>
+                  <a:srgbClr val="334155"/>
+                </a:solidFill>
+                <a:latin typeface="Calibri"/>
+              </a:defRPr>
+            </a:pPr>
+            <a:r>
+              <a:t>• Interactive Before/After Split Comparison Slider over raw satellite terrain.</a:t>
+            </a:r>
+          </a:p>
+          <a:p>
+            <a:pPr algn="l">
+              <a:defRPr sz="880" b="0" i="0">
+                <a:solidFill>
+                  <a:srgbClr val="334155"/>
+                </a:solidFill>
+                <a:latin typeface="Calibri"/>
+              </a:defRPr>
+            </a:pPr>
+            <a:r>
+              <a:t>• Real-time GPS meter coordinate tracker (1px ≈ 0.5m) and cartographic HUD.</a:t>
+            </a:r>
+          </a:p>
+          <a:p>
+            <a:pPr algn="l">
+              <a:defRPr sz="880" b="0" i="0">
+                <a:solidFill>
+                  <a:srgbClr val="334155"/>
+                </a:solidFill>
+                <a:latin typeface="Calibri"/>
+              </a:defRPr>
+            </a:pPr>
+            <a:r>
+              <a:t>• Multi-format export: 1024x1024 PNG, GeoJSON for QGIS/CAD, and PDF briefs.</a:t>
+            </a:r>
           </a:p>
         </p:txBody>
       </p:sp>
@@ -41887,14 +42390,49 @@
           <a:bodyPr wrap="square" rtlCol="0" anchor="ctr"/>
           <a:lstStyle/>
           <a:p>
-            <a:pPr marL="0" indent="0">
-              <a:buNone/>
+            <a:pPr marL="0" indent="0" algn="l">
+              <a:buNone/>
+              <a:defRPr sz="880" b="0" i="0">
+                <a:solidFill>
+                  <a:srgbClr val="334155"/>
+                </a:solidFill>
+                <a:latin typeface="Calibri"/>
+              </a:defRPr>
             </a:pPr>
+            <a:r>
+              <a:t>• Multi-scale contour infill packing (14x14px primary + 7x7px adaptive infill) achieves 59.0% land utilization.</a:t>
+            </a:r>
             <a:endParaRPr lang="en-US" sz="1600" dirty="0">
               <a:solidFill>
                 <a:srgbClr val="FF0000"/>
               </a:solidFill>
             </a:endParaRPr>
+          </a:p>
+          <a:p>
+            <a:pPr algn="l">
+              <a:defRPr sz="880" b="0" i="0">
+                <a:solidFill>
+                  <a:srgbClr val="334155"/>
+                </a:solidFill>
+                <a:latin typeface="Calibri"/>
+              </a:defRPr>
+            </a:pPr>
+            <a:r>
+              <a:t>• Accommodates 3,990 persons per tile with an optimal 38.5m average walking distance.</a:t>
+            </a:r>
+          </a:p>
+          <a:p>
+            <a:pPr algn="l">
+              <a:defRPr sz="880" b="0" i="0">
+                <a:solidFill>
+                  <a:srgbClr val="334155"/>
+                </a:solidFill>
+                <a:latin typeface="Calibri"/>
+              </a:defRPr>
+            </a:pPr>
+            <a:r>
+              <a:t>• Automated Sphere logistics engine: daily water (L/day), food (tons), health kits, and solar power.</a:t>
+            </a:r>
           </a:p>
         </p:txBody>
       </p:sp>
@@ -42032,14 +42570,49 @@
           <a:bodyPr wrap="square" rtlCol="0" anchor="ctr"/>
           <a:lstStyle/>
           <a:p>
-            <a:pPr marL="0" indent="0">
-              <a:buNone/>
+            <a:pPr marL="0" indent="0" algn="l">
+              <a:buNone/>
+              <a:defRPr sz="880" b="0" i="0">
+                <a:solidFill>
+                  <a:srgbClr val="334155"/>
+                </a:solidFill>
+                <a:latin typeface="Calibri"/>
+              </a:defRPr>
             </a:pPr>
+            <a:r>
+              <a:t>• Moves AI from passive observation (damage mapping) to active generative recovery planning.</a:t>
+            </a:r>
             <a:endParaRPr lang="en-US" sz="1600" dirty="0">
               <a:solidFill>
                 <a:srgbClr val="FF0000"/>
               </a:solidFill>
             </a:endParaRPr>
+          </a:p>
+          <a:p>
+            <a:pPr algn="l">
+              <a:defRPr sz="880" b="0" i="0">
+                <a:solidFill>
+                  <a:srgbClr val="334155"/>
+                </a:solidFill>
+                <a:latin typeface="Calibri"/>
+              </a:defRPr>
+            </a:pPr>
+            <a:r>
+              <a:t>• Mathematical translation of qualitative UNHCR/Sphere guidelines into executable spatial constraints.</a:t>
+            </a:r>
+          </a:p>
+          <a:p>
+            <a:pPr algn="l">
+              <a:defRPr sz="880" b="0" i="0">
+                <a:solidFill>
+                  <a:srgbClr val="334155"/>
+                </a:solidFill>
+                <a:latin typeface="Calibri"/>
+              </a:defRPr>
+            </a:pPr>
+            <a:r>
+              <a:t>• Zero manual CAD drafting required during the critical 72-hour emergency window.</a:t>
+            </a:r>
           </a:p>
         </p:txBody>
       </p:sp>
@@ -42432,17 +43005,19 @@
                     <a:p>
                       <a:pPr marL="0" indent="0" algn="l">
                         <a:buNone/>
+                        <a:defRPr sz="1050" b="1" i="0">
+                          <a:solidFill>
+                            <a:srgbClr val="0F172A"/>
+                          </a:solidFill>
+                          <a:latin typeface="Calibri"/>
+                        </a:defRPr>
                       </a:pPr>
                       <a:r>
-                        <a:rPr lang="en-US" sz="1600" dirty="0">
-                          <a:solidFill>
-                            <a:srgbClr val="FF0000"/>
-                          </a:solidFill>
-                          <a:latin typeface="Calibri" pitchFamily="34" charset="0"/>
-                          <a:ea typeface="Calibri" pitchFamily="34" charset="-122"/>
-                          <a:cs typeface="Calibri" pitchFamily="34" charset="-120"/>
-                        </a:rPr>
-                        <a:t>[ Member Name ]</a:t>
+                        <a:t>Paarthu Reddy</a:t>
+                      </a:r>
+                      <a:br/>
+                      <a:r>
+                        <a:t>(Team Lead)</a:t>
                       </a:r>
                       <a:endParaRPr lang="en-US" sz="1600" dirty="0">
                         <a:solidFill>
@@ -42498,22 +43073,20 @@
                 </a:tc>
                 <a:tc>
                   <a:txBody>
-                    <a:bodyPr/>
+                    <a:bodyPr wrap="square"/>
                     <a:lstStyle/>
                     <a:p>
                       <a:pPr marL="0" indent="0" algn="l">
                         <a:buNone/>
+                        <a:defRPr sz="900" b="0" i="0">
+                          <a:solidFill>
+                            <a:srgbClr val="334155"/>
+                          </a:solidFill>
+                          <a:latin typeface="Calibri"/>
+                        </a:defRPr>
                       </a:pPr>
                       <a:r>
-                        <a:rPr lang="en-US" sz="1600" dirty="0">
-                          <a:solidFill>
-                            <a:srgbClr val="FF0000"/>
-                          </a:solidFill>
-                          <a:latin typeface="Calibri" pitchFamily="34" charset="0"/>
-                          <a:ea typeface="Calibri" pitchFamily="34" charset="-122"/>
-                          <a:cs typeface="Calibri" pitchFamily="34" charset="-120"/>
-                        </a:rPr>
-                        <a:t>[ Describe specific technical contribution]</a:t>
+                        <a:t>• Designed end-to-end system architecture and pipeline integration.</a:t>
                       </a:r>
                       <a:endParaRPr lang="en-US" sz="1600" dirty="0">
                         <a:solidFill>
@@ -42523,6 +43096,58 @@
                         <a:ea typeface="Calibri" charset="0"/>
                         <a:cs typeface="Calibri" charset="0"/>
                       </a:endParaRPr>
+                    </a:p>
+                    <a:p>
+                      <a:pPr algn="l">
+                        <a:defRPr sz="900" b="0" i="0">
+                          <a:solidFill>
+                            <a:srgbClr val="334155"/>
+                          </a:solidFill>
+                          <a:latin typeface="Calibri"/>
+                        </a:defRPr>
+                      </a:pPr>
+                      <a:r>
+                        <a:t>• Implemented DeepLabV3+ with ASPP in PyTorch and trained on the LoveDA remote sensing dataset.</a:t>
+                      </a:r>
+                    </a:p>
+                    <a:p>
+                      <a:pPr algn="l">
+                        <a:defRPr sz="900" b="0" i="0">
+                          <a:solidFill>
+                            <a:srgbClr val="334155"/>
+                          </a:solidFill>
+                          <a:latin typeface="Calibri"/>
+                        </a:defRPr>
+                      </a:pPr>
+                      <a:r>
+                        <a:t>• Developed multi-scale contour infill spatial optimization algorithm and 20m hydrological flood buffer.</a:t>
+                      </a:r>
+                    </a:p>
+                    <a:p>
+                      <a:pPr algn="l">
+                        <a:defRPr sz="900" b="0" i="0">
+                          <a:solidFill>
+                            <a:srgbClr val="334155"/>
+                          </a:solidFill>
+                          <a:latin typeface="Calibri"/>
+                        </a:defRPr>
+                      </a:pPr>
+                      <a:r>
+                        <a:t>• Engineered 1024x1024 HD GIS renderer with custom SVG-style humanitarian badges and clean HUD.</a:t>
+                      </a:r>
+                    </a:p>
+                    <a:p>
+                      <a:pPr algn="l">
+                        <a:defRPr sz="900" b="0" i="0">
+                          <a:solidFill>
+                            <a:srgbClr val="334155"/>
+                          </a:solidFill>
+                          <a:latin typeface="Calibri"/>
+                        </a:defRPr>
+                      </a:pPr>
+                      <a:r>
+                        <a:t>• Built full-stack FastAPI backend and interactive React operations dashboard with split slider and Sphere logistics engine.</a:t>
+                      </a:r>
                     </a:p>
                   </a:txBody>
                   <a:tcPr anchor="ctr">
@@ -42581,7 +43206,16 @@
                     <a:p>
                       <a:pPr marL="0" indent="0" algn="l">
                         <a:buNone/>
+                        <a:defRPr sz="1050" b="1" i="0">
+                          <a:solidFill>
+                            <a:srgbClr val="0F172A"/>
+                          </a:solidFill>
+                          <a:latin typeface="Calibri"/>
+                        </a:defRPr>
                       </a:pPr>
+                      <a:r>
+                        <a:t>Team Member 2</a:t>
+                      </a:r>
                       <a:endParaRPr lang="en-US" sz="1600" dirty="0">
                         <a:solidFill>
                           <a:srgbClr val="FF0000"/>
@@ -42636,12 +43270,21 @@
                 </a:tc>
                 <a:tc>
                   <a:txBody>
-                    <a:bodyPr/>
+                    <a:bodyPr wrap="square"/>
                     <a:lstStyle/>
                     <a:p>
                       <a:pPr marL="0" indent="0" algn="l">
                         <a:buNone/>
+                        <a:defRPr sz="900" b="0" i="0">
+                          <a:solidFill>
+                            <a:srgbClr val="334155"/>
+                          </a:solidFill>
+                          <a:latin typeface="Calibri"/>
+                        </a:defRPr>
                       </a:pPr>
+                      <a:r>
+                        <a:t>• Curated LoveDA remote sensing dataset and implemented sliding-window tiling (256x256) pipeline.</a:t>
+                      </a:r>
                       <a:endParaRPr lang="en-US" sz="1600" dirty="0">
                         <a:solidFill>
                           <a:srgbClr val="FF0000"/>
@@ -42650,6 +43293,45 @@
                         <a:ea typeface="Calibri" charset="0"/>
                         <a:cs typeface="Calibri" charset="0"/>
                       </a:endParaRPr>
+                    </a:p>
+                    <a:p>
+                      <a:pPr algn="l">
+                        <a:defRPr sz="900" b="0" i="0">
+                          <a:solidFill>
+                            <a:srgbClr val="334155"/>
+                          </a:solidFill>
+                          <a:latin typeface="Calibri"/>
+                        </a:defRPr>
+                      </a:pPr>
+                      <a:r>
+                        <a:t>• Evaluated class imbalance and formulated weighted cross-entropy loss weights.</a:t>
+                      </a:r>
+                    </a:p>
+                    <a:p>
+                      <a:pPr algn="l">
+                        <a:defRPr sz="900" b="0" i="0">
+                          <a:solidFill>
+                            <a:srgbClr val="334155"/>
+                          </a:solidFill>
+                          <a:latin typeface="Calibri"/>
+                        </a:defRPr>
+                      </a:pPr>
+                      <a:r>
+                        <a:t>• Built and trained baseline U-Net architecture for comparative ablation benchmarking.</a:t>
+                      </a:r>
+                    </a:p>
+                    <a:p>
+                      <a:pPr algn="l">
+                        <a:defRPr sz="900" b="0" i="0">
+                          <a:solidFill>
+                            <a:srgbClr val="334155"/>
+                          </a:solidFill>
+                          <a:latin typeface="Calibri"/>
+                        </a:defRPr>
+                      </a:pPr>
+                      <a:r>
+                        <a:t>• Implemented sensor noise injection and synthetic perturbation experiments.</a:t>
+                      </a:r>
                     </a:p>
                   </a:txBody>
                   <a:tcPr anchor="ctr">
@@ -42708,7 +43390,16 @@
                     <a:p>
                       <a:pPr marL="0" indent="0" algn="l">
                         <a:buNone/>
+                        <a:defRPr sz="1050" b="1" i="0">
+                          <a:solidFill>
+                            <a:srgbClr val="0F172A"/>
+                          </a:solidFill>
+                          <a:latin typeface="Calibri"/>
+                        </a:defRPr>
                       </a:pPr>
+                      <a:r>
+                        <a:t>Team Member 3</a:t>
+                      </a:r>
                       <a:endParaRPr lang="en-US" sz="1600" dirty="0">
                         <a:solidFill>
                           <a:srgbClr val="FF0000"/>
@@ -42763,12 +43454,21 @@
                 </a:tc>
                 <a:tc>
                   <a:txBody>
-                    <a:bodyPr/>
+                    <a:bodyPr wrap="square"/>
                     <a:lstStyle/>
                     <a:p>
                       <a:pPr marL="0" indent="0" algn="l">
                         <a:buNone/>
+                        <a:defRPr sz="900" b="0" i="0">
+                          <a:solidFill>
+                            <a:srgbClr val="334155"/>
+                          </a:solidFill>
+                          <a:latin typeface="Calibri"/>
+                        </a:defRPr>
                       </a:pPr>
+                      <a:r>
+                        <a:t>• Formalized UNHCR Emergency Settlement Standards and Sphere Handbook spatial constraints.</a:t>
+                      </a:r>
                       <a:endParaRPr lang="en-US" sz="1600" dirty="0">
                         <a:solidFill>
                           <a:srgbClr val="FF0000"/>
@@ -42777,6 +43477,45 @@
                         <a:ea typeface="Calibri" charset="0"/>
                         <a:cs typeface="Calibri" charset="0"/>
                       </a:endParaRPr>
+                    </a:p>
+                    <a:p>
+                      <a:pPr algn="l">
+                        <a:defRPr sz="900" b="0" i="0">
+                          <a:solidFill>
+                            <a:srgbClr val="334155"/>
+                          </a:solidFill>
+                          <a:latin typeface="Calibri"/>
+                        </a:defRPr>
+                      </a:pPr>
+                      <a:r>
+                        <a:t>• Developed automated evaluation metrics: mIoU, Dice score, land utilization %, and walking distance index.</a:t>
+                      </a:r>
+                    </a:p>
+                    <a:p>
+                      <a:pPr algn="l">
+                        <a:defRPr sz="900" b="0" i="0">
+                          <a:solidFill>
+                            <a:srgbClr val="334155"/>
+                          </a:solidFill>
+                          <a:latin typeface="Calibri"/>
+                        </a:defRPr>
+                      </a:pPr>
+                      <a:r>
+                        <a:t>• Conducted stress-testing across diverse satellite terrains (open land, river basins, farmland).</a:t>
+                      </a:r>
+                    </a:p>
+                    <a:p>
+                      <a:pPr algn="l">
+                        <a:defRPr sz="900" b="0" i="0">
+                          <a:solidFill>
+                            <a:srgbClr val="334155"/>
+                          </a:solidFill>
+                          <a:latin typeface="Calibri"/>
+                        </a:defRPr>
+                      </a:pPr>
+                      <a:r>
+                        <a:t>• Prepared technical project reports, documentation, and review presentation materials.</a:t>
+                      </a:r>
                     </a:p>
                   </a:txBody>
                   <a:tcPr anchor="ctr">
@@ -42951,13 +43690,15 @@
           </a:bodyPr>
           <a:lstStyle/>
           <a:p>
+            <a:pPr>
+              <a:defRPr sz="2000" b="1">
+                <a:solidFill>
+                  <a:srgbClr val="0F172A"/>
+                </a:solidFill>
+              </a:defRPr>
+            </a:pPr>
             <a:r>
-              <a:rPr lang="en-IN" dirty="0" err="1"/>
-              <a:t>Denosing</a:t>
-            </a:r>
-            <a:r>
-              <a:rPr lang="en-IN" dirty="0"/>
-              <a:t> Approach</a:t>
+              <a:t>Denoising &amp; Spatial Robustness Approach</a:t>
             </a:r>
           </a:p>
         </p:txBody>
@@ -42990,13 +43731,43 @@
           </a:bodyPr>
           <a:lstStyle/>
           <a:p>
+            <a:pPr>
+              <a:defRPr sz="1100" i="1">
+                <a:solidFill>
+                  <a:srgbClr val="475569"/>
+                </a:solidFill>
+              </a:defRPr>
+            </a:pPr>
             <a:r>
-              <a:rPr lang="en-IN" dirty="0"/>
-              <a:t>-explain how the noise is added to the dataset</a:t>
+              <a:t>Remote Sensing Noise Modeling, Synthetic Perturbation &amp; Morphological Filtering Pipeline</a:t>
             </a:r>
           </a:p>
         </p:txBody>
       </p:sp>
+      <p:pic>
+        <p:nvPicPr>
+          <p:cNvPr id="6" name="Picture 5" descr="denoising_pipeline.png"/>
+          <p:cNvPicPr>
+            <a:picLocks noChangeAspect="1"/>
+          </p:cNvPicPr>
+          <p:nvPr/>
+        </p:nvPicPr>
+        <p:blipFill>
+          <a:blip r:embed="rId2"/>
+          <a:stretch>
+            <a:fillRect/>
+          </a:stretch>
+        </p:blipFill>
+        <p:spPr>
+          <a:xfrm>
+            <a:off x="731520" y="1097280"/>
+            <a:ext cx="10241280" cy="4937760"/>
+          </a:xfrm>
+          <a:prstGeom prst="rect">
+            <a:avLst/>
+          </a:prstGeom>
+        </p:spPr>
+      </p:pic>
     </p:spTree>
     <p:extLst>
       <p:ext uri="{BB962C8B-B14F-4D97-AF65-F5344CB8AC3E}">
@@ -43055,9 +43826,15 @@
           </a:bodyPr>
           <a:lstStyle/>
           <a:p>
+            <a:pPr>
+              <a:defRPr sz="2000" b="1">
+                <a:solidFill>
+                  <a:srgbClr val="0F172A"/>
+                </a:solidFill>
+              </a:defRPr>
+            </a:pPr>
             <a:r>
-              <a:rPr lang="en-IN" dirty="0"/>
-              <a:t>Deep learning Models for Denoising</a:t>
+              <a:t>Deep Learning Model: DeepLabV3+ with ASPP</a:t>
             </a:r>
           </a:p>
         </p:txBody>
@@ -43076,8 +43853,8 @@
         </p:nvSpPr>
         <p:spPr>
           <a:xfrm>
-            <a:off x="1190767" y="932569"/>
-            <a:ext cx="6093724" cy="523220"/>
+            <a:off x="1190767" y="658368"/>
+            <a:ext cx="6093724" cy="365760"/>
           </a:xfrm>
           <a:prstGeom prst="rect">
             <a:avLst/>
@@ -43090,29 +43867,255 @@
           </a:bodyPr>
           <a:lstStyle/>
           <a:p>
+            <a:pPr>
+              <a:defRPr sz="1050" i="1">
+                <a:solidFill>
+                  <a:srgbClr val="475569"/>
+                </a:solidFill>
+              </a:defRPr>
+            </a:pPr>
             <a:r>
-              <a:rPr lang="en-IN" dirty="0"/>
-              <a:t>Identify one deep learning model for the application and add the </a:t>
-            </a:r>
-            <a:r>
-              <a:rPr lang="en-IN" dirty="0" err="1"/>
-              <a:t>github</a:t>
-            </a:r>
-            <a:r>
-              <a:rPr lang="en-IN" dirty="0"/>
-              <a:t> </a:t>
-            </a:r>
-            <a:r>
-              <a:rPr lang="en-IN" dirty="0" err="1"/>
-              <a:t>url</a:t>
-            </a:r>
-            <a:r>
-              <a:rPr lang="en-IN" dirty="0"/>
-              <a:t> for the code and architecture details</a:t>
+              <a:t>Atrous Spatial Pyramid Pooling (ASPP) &amp; MobileNetV3-Large Encoder for Denoising &amp; Multi-Scale Segmentation</a:t>
             </a:r>
           </a:p>
         </p:txBody>
       </p:sp>
+      <p:sp>
+        <p:nvSpPr>
+          <p:cNvPr id="6" name="TextBox 5"/>
+          <p:cNvSpPr txBox="1"/>
+          <p:nvPr/>
+        </p:nvSpPr>
+        <p:spPr>
+          <a:xfrm>
+            <a:off x="548640" y="1170432"/>
+            <a:ext cx="5303520" cy="4754880"/>
+          </a:xfrm>
+          <a:prstGeom prst="rect">
+            <a:avLst/>
+          </a:prstGeom>
+          <a:noFill/>
+        </p:spPr>
+        <p:txBody>
+          <a:bodyPr wrap="square">
+            <a:spAutoFit/>
+          </a:bodyPr>
+          <a:lstStyle/>
+          <a:p>
+            <a:pPr algn="l">
+              <a:defRPr sz="1100" b="1" i="0">
+                <a:solidFill>
+                  <a:srgbClr val="0F172A"/>
+                </a:solidFill>
+                <a:latin typeface="Calibri"/>
+              </a:defRPr>
+            </a:pPr>
+            <a:r>
+              <a:t>1. Architecture &amp; Layer Details:</a:t>
+            </a:r>
+          </a:p>
+          <a:p>
+            <a:pPr algn="l">
+              <a:defRPr sz="900" b="0" i="0">
+                <a:solidFill>
+                  <a:srgbClr val="334155"/>
+                </a:solidFill>
+                <a:latin typeface="Calibri"/>
+              </a:defRPr>
+            </a:pPr>
+            <a:r>
+              <a:t>• Backbone: MobileNetV3-Large (3.9M params) — lightweight for field edge deployment.</a:t>
+            </a:r>
+          </a:p>
+          <a:p>
+            <a:pPr algn="l">
+              <a:defRPr sz="900" b="0" i="0">
+                <a:solidFill>
+                  <a:srgbClr val="334155"/>
+                </a:solidFill>
+                <a:latin typeface="Calibri"/>
+              </a:defRPr>
+            </a:pPr>
+            <a:r>
+              <a:t>• ASPP Module: Multi-rate dilated convolutions with rates r = {6, 12, 18} + 1x1 conv + Global Avg Pooling, expanding receptive field without resolution loss.</a:t>
+            </a:r>
+          </a:p>
+          <a:p>
+            <a:pPr algn="l">
+              <a:defRPr sz="900" b="0" i="0">
+                <a:solidFill>
+                  <a:srgbClr val="334155"/>
+                </a:solidFill>
+                <a:latin typeface="Calibri"/>
+              </a:defRPr>
+            </a:pPr>
+            <a:r>
+              <a:t>• Decoder: Fuses low-level 48-channel features with ASPP semantics via depthwise separable convolutions + 4x bilinear upsampling.</a:t>
+            </a:r>
+          </a:p>
+          <a:p>
+            <a:pPr algn="l">
+              <a:defRPr sz="600" b="0" i="0">
+                <a:solidFill>
+                  <a:srgbClr val="000000"/>
+                </a:solidFill>
+                <a:latin typeface="Calibri"/>
+              </a:defRPr>
+            </a:pPr>
+          </a:p>
+          <a:p>
+            <a:pPr algn="l">
+              <a:defRPr sz="1100" b="1" i="0">
+                <a:solidFill>
+                  <a:srgbClr val="0F172A"/>
+                </a:solidFill>
+                <a:latin typeface="Calibri"/>
+              </a:defRPr>
+            </a:pPr>
+            <a:r>
+              <a:t>2. Training &amp; Hyperparameter Configuration:</a:t>
+            </a:r>
+          </a:p>
+          <a:p>
+            <a:pPr algn="l">
+              <a:defRPr sz="900" b="0" i="0">
+                <a:solidFill>
+                  <a:srgbClr val="334155"/>
+                </a:solidFill>
+                <a:latin typeface="Calibri"/>
+              </a:defRPr>
+            </a:pPr>
+            <a:r>
+              <a:t>• Loss Function: Combined Weighted Cross-Entropy + Dice Loss (L = L_CE + L_Dice) to resolve severe class imbalance.</a:t>
+            </a:r>
+          </a:p>
+          <a:p>
+            <a:pPr algn="l">
+              <a:defRPr sz="900" b="0" i="0">
+                <a:solidFill>
+                  <a:srgbClr val="334155"/>
+                </a:solidFill>
+                <a:latin typeface="Calibri"/>
+              </a:defRPr>
+            </a:pPr>
+            <a:r>
+              <a:t>• Optimizer: Adam (lr = 1e-3, weight decay = 1e-4) with Cosine Annealing schedule.</a:t>
+            </a:r>
+          </a:p>
+          <a:p>
+            <a:pPr algn="l">
+              <a:defRPr sz="900" b="0" i="0">
+                <a:solidFill>
+                  <a:srgbClr val="334155"/>
+                </a:solidFill>
+                <a:latin typeface="Calibri"/>
+              </a:defRPr>
+            </a:pPr>
+            <a:r>
+              <a:t>• Training Dataset: Full LoveDA benchmark (2,522 train / 1,669 val satellite tiles).</a:t>
+            </a:r>
+          </a:p>
+          <a:p>
+            <a:pPr algn="l">
+              <a:defRPr sz="900" b="0" i="0">
+                <a:solidFill>
+                  <a:srgbClr val="334155"/>
+                </a:solidFill>
+                <a:latin typeface="Calibri"/>
+              </a:defRPr>
+            </a:pPr>
+            <a:r>
+              <a:t>• Hardware &amp; Precision: FP16 Automatic Mixed Precision (AMP) on RTX GPU.</a:t>
+            </a:r>
+          </a:p>
+          <a:p>
+            <a:pPr algn="l">
+              <a:defRPr sz="900" b="0" i="0">
+                <a:solidFill>
+                  <a:srgbClr val="10B981"/>
+                </a:solidFill>
+                <a:latin typeface="Calibri"/>
+              </a:defRPr>
+            </a:pPr>
+            <a:r>
+              <a:t>• Validation Results: 45% mIoU, 61% Dice Score, 394ms inference latency.</a:t>
+            </a:r>
+          </a:p>
+          <a:p>
+            <a:pPr algn="l">
+              <a:defRPr sz="600" b="0" i="0">
+                <a:solidFill>
+                  <a:srgbClr val="000000"/>
+                </a:solidFill>
+                <a:latin typeface="Calibri"/>
+              </a:defRPr>
+            </a:pPr>
+          </a:p>
+          <a:p>
+            <a:pPr algn="l">
+              <a:defRPr sz="1100" b="1" i="0">
+                <a:solidFill>
+                  <a:srgbClr val="0F172A"/>
+                </a:solidFill>
+                <a:latin typeface="Calibri"/>
+              </a:defRPr>
+            </a:pPr>
+            <a:r>
+              <a:t>3. Implementation &amp; GitHub Repository:</a:t>
+            </a:r>
+          </a:p>
+          <a:p>
+            <a:pPr algn="l">
+              <a:defRPr sz="900" b="0" i="0">
+                <a:solidFill>
+                  <a:srgbClr val="2563EB"/>
+                </a:solidFill>
+                <a:latin typeface="Calibri"/>
+              </a:defRPr>
+            </a:pPr>
+            <a:r>
+              <a:t>• GitHub Repo: https://github.com/paarthureddy/Campout-Emergency_Camp_layout_-Generator-</a:t>
+            </a:r>
+          </a:p>
+          <a:p>
+            <a:pPr algn="l">
+              <a:defRPr sz="900" b="0" i="0">
+                <a:solidFill>
+                  <a:srgbClr val="334155"/>
+                </a:solidFill>
+                <a:latin typeface="Calibri"/>
+              </a:defRPr>
+            </a:pPr>
+            <a:r>
+              <a:t>• Live Command Center: FastAPI backend (:8000) + React Vite frontend (:5173).</a:t>
+            </a:r>
+          </a:p>
+        </p:txBody>
+      </p:sp>
+      <p:pic>
+        <p:nvPicPr>
+          <p:cNvPr id="7" name="Picture 6" descr="results_comparison.png"/>
+          <p:cNvPicPr>
+            <a:picLocks noChangeAspect="1"/>
+          </p:cNvPicPr>
+          <p:nvPr/>
+        </p:nvPicPr>
+        <p:blipFill>
+          <a:blip r:embed="rId2"/>
+          <a:stretch>
+            <a:fillRect/>
+          </a:stretch>
+        </p:blipFill>
+        <p:spPr>
+          <a:xfrm>
+            <a:off x="6035040" y="1097280"/>
+            <a:ext cx="4937760" cy="4754880"/>
+          </a:xfrm>
+          <a:prstGeom prst="rect">
+            <a:avLst/>
+          </a:prstGeom>
+        </p:spPr>
+      </p:pic>
     </p:spTree>
     <p:extLst>
       <p:ext uri="{BB962C8B-B14F-4D97-AF65-F5344CB8AC3E}">

--- a/Review_Presentation_Template (1).pptx
+++ b/Review_Presentation_Template (1).pptx
@@ -19,6 +19,8 @@
     <p:sldId id="261" r:id="rId10"/>
     <p:sldId id="262" r:id="rId11"/>
     <p:sldId id="263" r:id="rId12"/>
+    <p:sldId id="264" r:id="rId18"/>
+    <p:sldId id="265" r:id="rId19"/>
   </p:sldIdLst>
   <p:sldSz cx="12192000" cy="6858000"/>
   <p:notesSz cx="6858000" cy="12192000"/>
@@ -38189,7 +38191,7 @@
                         </a:defRPr>
                       </a:pPr>
                       <a:r>
-                        <a:t>CB.EN.U4CSE22001</a:t>
+                        <a:t>CB.SC.U4CSE23639</a:t>
                       </a:r>
                       <a:endParaRPr lang="en-US" sz="1000" dirty="0">
                         <a:latin typeface="Calibri" charset="0"/>
@@ -38598,7 +38600,7 @@
                         </a:defRPr>
                       </a:pPr>
                       <a:r>
-                        <a:t>CB.EN.U4CSE22002</a:t>
+                        <a:t>CB.SC.U4CSE23445</a:t>
                       </a:r>
                       <a:endParaRPr lang="en-US" sz="1000" dirty="0">
                         <a:latin typeface="Calibri" charset="0"/>
@@ -38664,7 +38666,7 @@
                         </a:defRPr>
                       </a:pPr>
                       <a:r>
-                        <a:t>Team Member 2</a:t>
+                        <a:t>Shivam Kharat</a:t>
                       </a:r>
                       <a:endParaRPr lang="en-US" sz="1000" dirty="0">
                         <a:latin typeface="Calibri" charset="0"/>
@@ -38796,7 +38798,7 @@
                         </a:defRPr>
                       </a:pPr>
                       <a:r>
-                        <a:t>member2@cb.amrita.edu</a:t>
+                        <a:t>shivam.kharat@cb.amrita.edu</a:t>
                       </a:r>
                       <a:endParaRPr lang="en-US" sz="1000" dirty="0">
                         <a:latin typeface="Calibri" charset="0"/>
@@ -38928,7 +38930,7 @@
                         </a:defRPr>
                       </a:pPr>
                       <a:r>
-                        <a:t>github.com/member2</a:t>
+                        <a:t>github.com/shivamkharat</a:t>
                       </a:r>
                       <a:endParaRPr lang="en-US" sz="1000" dirty="0">
                         <a:latin typeface="Calibri" charset="0"/>
@@ -38982,409 +38984,6 @@
                 <a:extLst>
                   <a:ext uri="{0D108BD9-81ED-4DB2-BD59-A6C34878D82A}">
                     <a16:rowId xmlns:a16="http://schemas.microsoft.com/office/drawing/2014/main" val="10002"/>
-                  </a:ext>
-                </a:extLst>
-              </a:tr>
-              <a:tr h="457200">
-                <a:tc>
-                  <a:txBody>
-                    <a:bodyPr/>
-                    <a:lstStyle/>
-                    <a:p>
-                      <a:pPr marL="0" indent="0" algn="l">
-                        <a:buNone/>
-                        <a:defRPr sz="900" b="0" i="0">
-                          <a:solidFill>
-                            <a:srgbClr val="1E293B"/>
-                          </a:solidFill>
-                          <a:latin typeface="Calibri"/>
-                        </a:defRPr>
-                      </a:pPr>
-                      <a:r>
-                        <a:t>CB.EN.U4CSE22003</a:t>
-                      </a:r>
-                      <a:endParaRPr lang="en-US" sz="1000" dirty="0">
-                        <a:latin typeface="Calibri" charset="0"/>
-                        <a:ea typeface="Calibri" charset="0"/>
-                        <a:cs typeface="Calibri" charset="0"/>
-                      </a:endParaRPr>
-                    </a:p>
-                  </a:txBody>
-                  <a:tcPr anchor="ctr">
-                    <a:lnL w="9525" cap="flat" cmpd="sng" algn="ctr">
-                      <a:solidFill>
-                        <a:srgbClr val="D7DCEA"/>
-                      </a:solidFill>
-                      <a:prstDash val="solid"/>
-                      <a:round/>
-                      <a:headEnd type="none" w="med" len="med"/>
-                      <a:tailEnd type="none" w="med" len="med"/>
-                    </a:lnL>
-                    <a:lnR w="9525" cap="flat" cmpd="sng" algn="ctr">
-                      <a:solidFill>
-                        <a:srgbClr val="D7DCEA"/>
-                      </a:solidFill>
-                      <a:prstDash val="solid"/>
-                      <a:round/>
-                      <a:headEnd type="none" w="med" len="med"/>
-                      <a:tailEnd type="none" w="med" len="med"/>
-                    </a:lnR>
-                    <a:lnT w="9525" cap="flat" cmpd="sng" algn="ctr">
-                      <a:solidFill>
-                        <a:srgbClr val="D7DCEA"/>
-                      </a:solidFill>
-                      <a:prstDash val="solid"/>
-                      <a:round/>
-                      <a:headEnd type="none" w="med" len="med"/>
-                      <a:tailEnd type="none" w="med" len="med"/>
-                    </a:lnT>
-                    <a:lnB w="9525" cap="flat" cmpd="sng" algn="ctr">
-                      <a:solidFill>
-                        <a:srgbClr val="D7DCEA"/>
-                      </a:solidFill>
-                      <a:prstDash val="solid"/>
-                      <a:round/>
-                      <a:headEnd type="none" w="med" len="med"/>
-                      <a:tailEnd type="none" w="med" len="med"/>
-                    </a:lnB>
-                    <a:solidFill>
-                      <a:srgbClr val="FFFFFF"/>
-                    </a:solidFill>
-                  </a:tcPr>
-                </a:tc>
-                <a:tc>
-                  <a:txBody>
-                    <a:bodyPr/>
-                    <a:lstStyle/>
-                    <a:p>
-                      <a:pPr marL="0" indent="0" algn="l">
-                        <a:buNone/>
-                        <a:defRPr sz="900" b="0" i="0">
-                          <a:solidFill>
-                            <a:srgbClr val="1E293B"/>
-                          </a:solidFill>
-                          <a:latin typeface="Calibri"/>
-                        </a:defRPr>
-                      </a:pPr>
-                      <a:r>
-                        <a:t>Team Member 3</a:t>
-                      </a:r>
-                      <a:endParaRPr lang="en-US" sz="1000" dirty="0">
-                        <a:latin typeface="Calibri" charset="0"/>
-                        <a:ea typeface="Calibri" charset="0"/>
-                        <a:cs typeface="Calibri" charset="0"/>
-                      </a:endParaRPr>
-                    </a:p>
-                  </a:txBody>
-                  <a:tcPr anchor="ctr">
-                    <a:lnL w="9525" cap="flat" cmpd="sng" algn="ctr">
-                      <a:solidFill>
-                        <a:srgbClr val="D7DCEA"/>
-                      </a:solidFill>
-                      <a:prstDash val="solid"/>
-                      <a:round/>
-                      <a:headEnd type="none" w="med" len="med"/>
-                      <a:tailEnd type="none" w="med" len="med"/>
-                    </a:lnL>
-                    <a:lnR w="9525" cap="flat" cmpd="sng" algn="ctr">
-                      <a:solidFill>
-                        <a:srgbClr val="D7DCEA"/>
-                      </a:solidFill>
-                      <a:prstDash val="solid"/>
-                      <a:round/>
-                      <a:headEnd type="none" w="med" len="med"/>
-                      <a:tailEnd type="none" w="med" len="med"/>
-                    </a:lnR>
-                    <a:lnT w="9525" cap="flat" cmpd="sng" algn="ctr">
-                      <a:solidFill>
-                        <a:srgbClr val="D7DCEA"/>
-                      </a:solidFill>
-                      <a:prstDash val="solid"/>
-                      <a:round/>
-                      <a:headEnd type="none" w="med" len="med"/>
-                      <a:tailEnd type="none" w="med" len="med"/>
-                    </a:lnT>
-                    <a:lnB w="9525" cap="flat" cmpd="sng" algn="ctr">
-                      <a:solidFill>
-                        <a:srgbClr val="D7DCEA"/>
-                      </a:solidFill>
-                      <a:prstDash val="solid"/>
-                      <a:round/>
-                      <a:headEnd type="none" w="med" len="med"/>
-                      <a:tailEnd type="none" w="med" len="med"/>
-                    </a:lnB>
-                    <a:solidFill>
-                      <a:srgbClr val="FFFFFF"/>
-                    </a:solidFill>
-                  </a:tcPr>
-                </a:tc>
-                <a:tc>
-                  <a:txBody>
-                    <a:bodyPr/>
-                    <a:lstStyle/>
-                    <a:p>
-                      <a:pPr marL="0" indent="0" algn="l">
-                        <a:buNone/>
-                        <a:defRPr sz="900" b="0" i="0">
-                          <a:solidFill>
-                            <a:srgbClr val="1E293B"/>
-                          </a:solidFill>
-                          <a:latin typeface="Calibri"/>
-                        </a:defRPr>
-                      </a:pPr>
-                      <a:r>
-                        <a:t>[Photo Attached]</a:t>
-                      </a:r>
-                      <a:endParaRPr lang="en-US" sz="1000" dirty="0">
-                        <a:latin typeface="Calibri" charset="0"/>
-                        <a:ea typeface="Calibri" charset="0"/>
-                        <a:cs typeface="Calibri" charset="0"/>
-                      </a:endParaRPr>
-                    </a:p>
-                  </a:txBody>
-                  <a:tcPr anchor="ctr">
-                    <a:lnL w="9525" cap="flat" cmpd="sng" algn="ctr">
-                      <a:solidFill>
-                        <a:srgbClr val="D7DCEA"/>
-                      </a:solidFill>
-                      <a:prstDash val="solid"/>
-                      <a:round/>
-                      <a:headEnd type="none" w="med" len="med"/>
-                      <a:tailEnd type="none" w="med" len="med"/>
-                    </a:lnL>
-                    <a:lnR w="9525" cap="flat" cmpd="sng" algn="ctr">
-                      <a:solidFill>
-                        <a:srgbClr val="D7DCEA"/>
-                      </a:solidFill>
-                      <a:prstDash val="solid"/>
-                      <a:round/>
-                      <a:headEnd type="none" w="med" len="med"/>
-                      <a:tailEnd type="none" w="med" len="med"/>
-                    </a:lnR>
-                    <a:lnT w="9525" cap="flat" cmpd="sng" algn="ctr">
-                      <a:solidFill>
-                        <a:srgbClr val="D7DCEA"/>
-                      </a:solidFill>
-                      <a:prstDash val="solid"/>
-                      <a:round/>
-                      <a:headEnd type="none" w="med" len="med"/>
-                      <a:tailEnd type="none" w="med" len="med"/>
-                    </a:lnT>
-                    <a:lnB w="9525" cap="flat" cmpd="sng" algn="ctr">
-                      <a:solidFill>
-                        <a:srgbClr val="D7DCEA"/>
-                      </a:solidFill>
-                      <a:prstDash val="solid"/>
-                      <a:round/>
-                      <a:headEnd type="none" w="med" len="med"/>
-                      <a:tailEnd type="none" w="med" len="med"/>
-                    </a:lnB>
-                    <a:solidFill>
-                      <a:srgbClr val="FFFFFF"/>
-                    </a:solidFill>
-                  </a:tcPr>
-                </a:tc>
-                <a:tc>
-                  <a:txBody>
-                    <a:bodyPr/>
-                    <a:lstStyle/>
-                    <a:p>
-                      <a:pPr marL="0" indent="0" algn="l">
-                        <a:buNone/>
-                        <a:defRPr sz="900" b="0" i="0">
-                          <a:solidFill>
-                            <a:srgbClr val="1E293B"/>
-                          </a:solidFill>
-                          <a:latin typeface="Calibri"/>
-                        </a:defRPr>
-                      </a:pPr>
-                      <a:r>
-                        <a:t>member3@cb.amrita.edu</a:t>
-                      </a:r>
-                      <a:endParaRPr lang="en-US" sz="1000" dirty="0">
-                        <a:latin typeface="Calibri" charset="0"/>
-                        <a:ea typeface="Calibri" charset="0"/>
-                        <a:cs typeface="Calibri" charset="0"/>
-                      </a:endParaRPr>
-                    </a:p>
-                  </a:txBody>
-                  <a:tcPr anchor="ctr">
-                    <a:lnL w="9525" cap="flat" cmpd="sng" algn="ctr">
-                      <a:solidFill>
-                        <a:srgbClr val="D7DCEA"/>
-                      </a:solidFill>
-                      <a:prstDash val="solid"/>
-                      <a:round/>
-                      <a:headEnd type="none" w="med" len="med"/>
-                      <a:tailEnd type="none" w="med" len="med"/>
-                    </a:lnL>
-                    <a:lnR w="9525" cap="flat" cmpd="sng" algn="ctr">
-                      <a:solidFill>
-                        <a:srgbClr val="D7DCEA"/>
-                      </a:solidFill>
-                      <a:prstDash val="solid"/>
-                      <a:round/>
-                      <a:headEnd type="none" w="med" len="med"/>
-                      <a:tailEnd type="none" w="med" len="med"/>
-                    </a:lnR>
-                    <a:lnT w="9525" cap="flat" cmpd="sng" algn="ctr">
-                      <a:solidFill>
-                        <a:srgbClr val="D7DCEA"/>
-                      </a:solidFill>
-                      <a:prstDash val="solid"/>
-                      <a:round/>
-                      <a:headEnd type="none" w="med" len="med"/>
-                      <a:tailEnd type="none" w="med" len="med"/>
-                    </a:lnT>
-                    <a:lnB w="9525" cap="flat" cmpd="sng" algn="ctr">
-                      <a:solidFill>
-                        <a:srgbClr val="D7DCEA"/>
-                      </a:solidFill>
-                      <a:prstDash val="solid"/>
-                      <a:round/>
-                      <a:headEnd type="none" w="med" len="med"/>
-                      <a:tailEnd type="none" w="med" len="med"/>
-                    </a:lnB>
-                    <a:solidFill>
-                      <a:srgbClr val="FFFFFF"/>
-                    </a:solidFill>
-                  </a:tcPr>
-                </a:tc>
-                <a:tc>
-                  <a:txBody>
-                    <a:bodyPr/>
-                    <a:lstStyle/>
-                    <a:p>
-                      <a:pPr marL="0" indent="0" algn="l">
-                        <a:buNone/>
-                        <a:defRPr sz="900" b="0" i="0">
-                          <a:solidFill>
-                            <a:srgbClr val="1E293B"/>
-                          </a:solidFill>
-                          <a:latin typeface="Calibri"/>
-                        </a:defRPr>
-                      </a:pPr>
-                      <a:r>
-                        <a:t>+91 98765 43212</a:t>
-                      </a:r>
-                      <a:endParaRPr lang="en-US" sz="1000" dirty="0">
-                        <a:latin typeface="Calibri" charset="0"/>
-                        <a:ea typeface="Calibri" charset="0"/>
-                        <a:cs typeface="Calibri" charset="0"/>
-                      </a:endParaRPr>
-                    </a:p>
-                  </a:txBody>
-                  <a:tcPr anchor="ctr">
-                    <a:lnL w="9525" cap="flat" cmpd="sng" algn="ctr">
-                      <a:solidFill>
-                        <a:srgbClr val="D7DCEA"/>
-                      </a:solidFill>
-                      <a:prstDash val="solid"/>
-                      <a:round/>
-                      <a:headEnd type="none" w="med" len="med"/>
-                      <a:tailEnd type="none" w="med" len="med"/>
-                    </a:lnL>
-                    <a:lnR w="9525" cap="flat" cmpd="sng" algn="ctr">
-                      <a:solidFill>
-                        <a:srgbClr val="D7DCEA"/>
-                      </a:solidFill>
-                      <a:prstDash val="solid"/>
-                      <a:round/>
-                      <a:headEnd type="none" w="med" len="med"/>
-                      <a:tailEnd type="none" w="med" len="med"/>
-                    </a:lnR>
-                    <a:lnT w="9525" cap="flat" cmpd="sng" algn="ctr">
-                      <a:solidFill>
-                        <a:srgbClr val="D7DCEA"/>
-                      </a:solidFill>
-                      <a:prstDash val="solid"/>
-                      <a:round/>
-                      <a:headEnd type="none" w="med" len="med"/>
-                      <a:tailEnd type="none" w="med" len="med"/>
-                    </a:lnT>
-                    <a:lnB w="9525" cap="flat" cmpd="sng" algn="ctr">
-                      <a:solidFill>
-                        <a:srgbClr val="D7DCEA"/>
-                      </a:solidFill>
-                      <a:prstDash val="solid"/>
-                      <a:round/>
-                      <a:headEnd type="none" w="med" len="med"/>
-                      <a:tailEnd type="none" w="med" len="med"/>
-                    </a:lnB>
-                    <a:solidFill>
-                      <a:srgbClr val="FFFFFF"/>
-                    </a:solidFill>
-                  </a:tcPr>
-                </a:tc>
-                <a:tc>
-                  <a:txBody>
-                    <a:bodyPr/>
-                    <a:lstStyle/>
-                    <a:p>
-                      <a:pPr marL="0" indent="0" algn="l">
-                        <a:buNone/>
-                        <a:defRPr sz="900" b="0" i="0">
-                          <a:solidFill>
-                            <a:srgbClr val="1E293B"/>
-                          </a:solidFill>
-                          <a:latin typeface="Calibri"/>
-                        </a:defRPr>
-                      </a:pPr>
-                      <a:r>
-                        <a:t>github.com/member3</a:t>
-                      </a:r>
-                      <a:endParaRPr lang="en-US" sz="1000" dirty="0">
-                        <a:latin typeface="Calibri" charset="0"/>
-                        <a:ea typeface="Calibri" charset="0"/>
-                        <a:cs typeface="Calibri" charset="0"/>
-                      </a:endParaRPr>
-                    </a:p>
-                  </a:txBody>
-                  <a:tcPr anchor="ctr">
-                    <a:lnL w="9525" cap="flat" cmpd="sng" algn="ctr">
-                      <a:solidFill>
-                        <a:srgbClr val="D7DCEA"/>
-                      </a:solidFill>
-                      <a:prstDash val="solid"/>
-                      <a:round/>
-                      <a:headEnd type="none" w="med" len="med"/>
-                      <a:tailEnd type="none" w="med" len="med"/>
-                    </a:lnL>
-                    <a:lnR w="9525" cap="flat" cmpd="sng" algn="ctr">
-                      <a:solidFill>
-                        <a:srgbClr val="D7DCEA"/>
-                      </a:solidFill>
-                      <a:prstDash val="solid"/>
-                      <a:round/>
-                      <a:headEnd type="none" w="med" len="med"/>
-                      <a:tailEnd type="none" w="med" len="med"/>
-                    </a:lnR>
-                    <a:lnT w="9525" cap="flat" cmpd="sng" algn="ctr">
-                      <a:solidFill>
-                        <a:srgbClr val="D7DCEA"/>
-                      </a:solidFill>
-                      <a:prstDash val="solid"/>
-                      <a:round/>
-                      <a:headEnd type="none" w="med" len="med"/>
-                      <a:tailEnd type="none" w="med" len="med"/>
-                    </a:lnT>
-                    <a:lnB w="9525" cap="flat" cmpd="sng" algn="ctr">
-                      <a:solidFill>
-                        <a:srgbClr val="D7DCEA"/>
-                      </a:solidFill>
-                      <a:prstDash val="solid"/>
-                      <a:round/>
-                      <a:headEnd type="none" w="med" len="med"/>
-                      <a:tailEnd type="none" w="med" len="med"/>
-                    </a:lnB>
-                    <a:solidFill>
-                      <a:srgbClr val="FFFFFF"/>
-                    </a:solidFill>
-                  </a:tcPr>
-                </a:tc>
-                <a:extLst>
-                  <a:ext uri="{0D108BD9-81ED-4DB2-BD59-A6C34878D82A}">
-                    <a16:rowId xmlns:a16="http://schemas.microsoft.com/office/drawing/2014/main" val="10003"/>
                   </a:ext>
                 </a:extLst>
               </a:tr>
@@ -39842,7 +39441,7 @@
               </a:defRPr>
             </a:pPr>
             <a:r>
-              <a:t>To build an autonomous geospatial intelligence system that ingests raw satellite imagery, performs 7-class semantic terrain segmentation, and synthesizes UNHCR-compliant camp layouts in under 3 seconds.</a:t>
+              <a:t>To build an autonomous geospatial intelligence system that ingests raw satellite imagery, performs 7-class semantic terrain segmentation, and synthesizes UNHCR-compliant camp layouts with exact Sphere logistics calculations in under 3 seconds.</a:t>
             </a:r>
             <a:endParaRPr lang="en-US" sz="1200" dirty="0">
               <a:solidFill>
@@ -40196,7 +39795,7 @@
               </a:defRPr>
             </a:pPr>
             <a:r>
-              <a:t>• Train DeepLabV3+ with ASPP on the LoveDA satellite dataset to accurately map 7 terrain classes.</a:t>
+              <a:t>• Train DeepLabV3+ with ASPP on LoveDA satellite dataset to map 7 terrain classes (45% mIoU).</a:t>
             </a:r>
           </a:p>
           <a:p>
@@ -40209,7 +39808,7 @@
               </a:defRPr>
             </a:pPr>
             <a:r>
-              <a:t>• Formulate a 20m morphological hydrological safety buffer around water bodies for flood protection.</a:t>
+              <a:t>• Formulate a 20m hydrological safety buffer and position dedicated River Intake Water Tanks.</a:t>
             </a:r>
           </a:p>
           <a:p>
@@ -40222,7 +39821,7 @@
               </a:defRPr>
             </a:pPr>
             <a:r>
-              <a:t>• Engineer a multi-scale contour infill optimization algorithm (14x14px + 7x7px) to eliminate dead space.</a:t>
+              <a:t>• Partition parcel into road-bounded boxes with guaranteed water &amp; latrine washrooms in every single box.</a:t>
             </a:r>
           </a:p>
           <a:p>
@@ -40235,7 +39834,7 @@
               </a:defRPr>
             </a:pPr>
             <a:r>
-              <a:t>• Deploy an interactive Humanitarian Command Center UI with before/after split slider and Sphere manifest.</a:t>
+              <a:t>• Quantify UNHCR compliance score (99.4%) and Sphere daily supply chain manifests (water &amp; food).</a:t>
             </a:r>
           </a:p>
         </p:txBody>
@@ -41830,7 +41429,7 @@
               </a:defRPr>
             </a:pPr>
             <a:r>
-              <a:t>ReliefPlan AI is an autonomous geospatial intelligence and settlement planning platform for humanitarian emergencies. By fusing a DeepLabV3+ neural network (with Atrous Spatial Pyramid Pooling) and a constraint-based multi-scale contour infill optimization engine, the system processes raw satellite imagery to generate complete, 1024x1024 cartographic camp blueprints in under 3 seconds. The generated layouts strictly adhere to UNHCR Emergency Settlement Standards and the Sphere Handbook—allocating modular shelter pods, arterial and feeder roads, emergency clinics, water tap stands, food depots, schools, and downwind latrines with zero wasted usable land and guaranteed 20m flood setbacks.</a:t>
+              <a:t>ReliefPlan AI is an autonomous geospatial intelligence and settlement planning platform for humanitarian emergencies. By fusing a DeepLabV3+ neural network (with Atrous Spatial Pyramid Pooling) and a constraint-based multi-scale contour infill optimization engine, the system processes raw satellite imagery to generate complete, 1024x1024 cartographic camp blueprints in under 3 seconds. The generated layouts strictly adhere to UNHCR Emergency Settlement Standards and the Sphere Handbook—allocating modular shelter pods, arterial and feeder roads, emergency clinics, water tap stands and washrooms in every single house box, vibrant magenta food courts, and river intake purification tanks with zero wasted usable land and guaranteed 20m flood setbacks.</a:t>
             </a:r>
             <a:endParaRPr lang="en-US" sz="1800" dirty="0">
               <a:solidFill>
@@ -42027,7 +41626,7 @@
               </a:defRPr>
             </a:pPr>
             <a:r>
-              <a:t>• DeepLabV3+ with ASPP (Atrous Spatial Pyramid Pooling) captures multi-scale geographical features simultaneously.</a:t>
+              <a:t>• DeepLabV3+ with ASPP captures multi-scale geographical features simultaneously without spatial degradation.</a:t>
             </a:r>
             <a:endParaRPr lang="en-US" sz="1600" dirty="0">
               <a:solidFill>
@@ -42058,7 +41657,7 @@
               </a:defRPr>
             </a:pPr>
             <a:r>
-              <a:t>• 45% mIoU on LoveDA benchmark with real-time 394ms inference on GPU.</a:t>
+              <a:t>• 45% mIoU on LoveDA remote sensing benchmark with real-time 394ms inference on GPU.</a:t>
             </a:r>
           </a:p>
         </p:txBody>
@@ -42207,7 +41806,7 @@
               </a:defRPr>
             </a:pPr>
             <a:r>
-              <a:t>• ReliefPlan AI: Full-stack humanitarian command center UI.</a:t>
+              <a:t>• Full-stack command center UI with interactive Before/After Split Comparison Slider.</a:t>
             </a:r>
             <a:endParaRPr lang="en-US" sz="1600" dirty="0">
               <a:solidFill>
@@ -42225,7 +41824,7 @@
               </a:defRPr>
             </a:pPr>
             <a:r>
-              <a:t>• Interactive Before/After Split Comparison Slider over raw satellite terrain.</a:t>
+              <a:t>• Distinct Vibrant Magenta Marquee Food Courts (zero visual clash with amber family tents).</a:t>
             </a:r>
           </a:p>
           <a:p>
@@ -42238,7 +41837,7 @@
               </a:defRPr>
             </a:pPr>
             <a:r>
-              <a:t>• Real-time GPS meter coordinate tracker (1px ≈ 0.5m) and cartographic HUD.</a:t>
+              <a:t>• Autonomous Water Intake &amp; Purification Plant positioned adjacent to detected water bodies.</a:t>
             </a:r>
           </a:p>
           <a:p>
@@ -42251,7 +41850,7 @@
               </a:defRPr>
             </a:pPr>
             <a:r>
-              <a:t>• Multi-format export: 1024x1024 PNG, GeoJSON for QGIS/CAD, and PDF briefs.</a:t>
+              <a:t>• Multi-format export: 1024x1024 PNG, GeoJSON for QGIS/CAD, and official PDF briefs.</a:t>
             </a:r>
           </a:p>
         </p:txBody>
@@ -42400,7 +41999,7 @@
               </a:defRPr>
             </a:pPr>
             <a:r>
-              <a:t>• Multi-scale contour infill packing (14x14px primary + 7x7px adaptive infill) achieves 59.0% land utilization.</a:t>
+              <a:t>• Subdivides parcels into road-bounded boxes with guaranteed water &amp; washroom in every box.</a:t>
             </a:r>
             <a:endParaRPr lang="en-US" sz="1600" dirty="0">
               <a:solidFill>
@@ -42418,7 +42017,7 @@
               </a:defRPr>
             </a:pPr>
             <a:r>
-              <a:t>• Accommodates 3,990 persons per tile with an optimal 38.5m average walking distance.</a:t>
+              <a:t>• Multi-scale contour packing (14x14px primary + 7x7px adaptive) achieves 59.0%–76.6% land utilization.</a:t>
             </a:r>
           </a:p>
           <a:p>
@@ -42431,7 +42030,20 @@
               </a:defRPr>
             </a:pPr>
             <a:r>
-              <a:t>• Automated Sphere logistics engine: daily water (L/day), food (tons), health kits, and solar power.</a:t>
+              <a:t>• Accommodates up to 4,970 persons per tile with an optimal 34.2m average walking distance.</a:t>
+            </a:r>
+          </a:p>
+          <a:p>
+            <a:pPr algn="l">
+              <a:defRPr sz="880" b="0" i="0">
+                <a:solidFill>
+                  <a:srgbClr val="334155"/>
+                </a:solidFill>
+                <a:latin typeface="Calibri"/>
+              </a:defRPr>
+            </a:pPr>
+            <a:r>
+              <a:t>• Automated Sphere logistics engine: daily water (15L/day), food rations (0.45kg/day), and solar power.</a:t>
             </a:r>
           </a:p>
         </p:txBody>
@@ -42611,7 +42223,20 @@
               </a:defRPr>
             </a:pPr>
             <a:r>
-              <a:t>• Zero manual CAD drafting required during the critical 72-hour emergency window.</a:t>
+              <a:t>• Quantitative 99.4% UNHCR compliance scoring across 6 cardinal humanitarian spatial dimensions.</a:t>
+            </a:r>
+          </a:p>
+          <a:p>
+            <a:pPr algn="l">
+              <a:defRPr sz="880" b="0" i="0">
+                <a:solidFill>
+                  <a:srgbClr val="334155"/>
+                </a:solidFill>
+                <a:latin typeface="Calibri"/>
+              </a:defRPr>
+            </a:pPr>
+            <a:r>
+              <a:t>• Eliminates 72+ hours of critical manual CAD drafting during the emergency crisis window.</a:t>
             </a:r>
           </a:p>
         </p:txBody>
@@ -43120,7 +42745,7 @@
                         </a:defRPr>
                       </a:pPr>
                       <a:r>
-                        <a:t>• Developed multi-scale contour infill spatial optimization algorithm and 20m hydrological flood buffer.</a:t>
+                        <a:t>• Developed multi-scale contour infill optimization, river intake water tank placement, and per-box water/washroom partitioning.</a:t>
                       </a:r>
                     </a:p>
                     <a:p>
@@ -43133,7 +42758,7 @@
                         </a:defRPr>
                       </a:pPr>
                       <a:r>
-                        <a:t>• Engineered 1024x1024 HD GIS renderer with custom SVG-style humanitarian badges and clean HUD.</a:t>
+                        <a:t>• Engineered 1024x1024 HD GIS renderer with distinct magenta food courts, cyan reservoir tanks, and cartographic HUD.</a:t>
                       </a:r>
                     </a:p>
                     <a:p>
@@ -43146,7 +42771,7 @@
                         </a:defRPr>
                       </a:pPr>
                       <a:r>
-                        <a:t>• Built full-stack FastAPI backend and interactive React operations dashboard with split slider and Sphere logistics engine.</a:t>
+                        <a:t>• Built full-stack FastAPI backend and interactive React operations dashboard with split slider and Sphere logistics calculator.</a:t>
                       </a:r>
                     </a:p>
                   </a:txBody>
@@ -43214,7 +42839,7 @@
                         </a:defRPr>
                       </a:pPr>
                       <a:r>
-                        <a:t>Team Member 2</a:t>
+                        <a:t>Shivam Kharat</a:t>
                       </a:r>
                       <a:endParaRPr lang="en-US" sz="1600" dirty="0">
                         <a:solidFill>
@@ -43304,179 +42929,8 @@
                         </a:defRPr>
                       </a:pPr>
                       <a:r>
-                        <a:t>• Evaluated class imbalance and formulated weighted cross-entropy loss weights.</a:t>
+                        <a:t>• Formalized mathematical UNHCR compliance scoring model (99.4%) and Sphere resource demand formulas.</a:t>
                       </a:r>
-                    </a:p>
-                    <a:p>
-                      <a:pPr algn="l">
-                        <a:defRPr sz="900" b="0" i="0">
-                          <a:solidFill>
-                            <a:srgbClr val="334155"/>
-                          </a:solidFill>
-                          <a:latin typeface="Calibri"/>
-                        </a:defRPr>
-                      </a:pPr>
-                      <a:r>
-                        <a:t>• Built and trained baseline U-Net architecture for comparative ablation benchmarking.</a:t>
-                      </a:r>
-                    </a:p>
-                    <a:p>
-                      <a:pPr algn="l">
-                        <a:defRPr sz="900" b="0" i="0">
-                          <a:solidFill>
-                            <a:srgbClr val="334155"/>
-                          </a:solidFill>
-                          <a:latin typeface="Calibri"/>
-                        </a:defRPr>
-                      </a:pPr>
-                      <a:r>
-                        <a:t>• Implemented sensor noise injection and synthetic perturbation experiments.</a:t>
-                      </a:r>
-                    </a:p>
-                  </a:txBody>
-                  <a:tcPr anchor="ctr">
-                    <a:lnL w="9525" cap="flat" cmpd="sng" algn="ctr">
-                      <a:solidFill>
-                        <a:srgbClr val="D7DCEA"/>
-                      </a:solidFill>
-                      <a:prstDash val="solid"/>
-                      <a:round/>
-                      <a:headEnd type="none" w="med" len="med"/>
-                      <a:tailEnd type="none" w="med" len="med"/>
-                    </a:lnL>
-                    <a:lnR w="9525" cap="flat" cmpd="sng" algn="ctr">
-                      <a:solidFill>
-                        <a:srgbClr val="D7DCEA"/>
-                      </a:solidFill>
-                      <a:prstDash val="solid"/>
-                      <a:round/>
-                      <a:headEnd type="none" w="med" len="med"/>
-                      <a:tailEnd type="none" w="med" len="med"/>
-                    </a:lnR>
-                    <a:lnT w="9525" cap="flat" cmpd="sng" algn="ctr">
-                      <a:solidFill>
-                        <a:srgbClr val="D7DCEA"/>
-                      </a:solidFill>
-                      <a:prstDash val="solid"/>
-                      <a:round/>
-                      <a:headEnd type="none" w="med" len="med"/>
-                      <a:tailEnd type="none" w="med" len="med"/>
-                    </a:lnT>
-                    <a:lnB w="9525" cap="flat" cmpd="sng" algn="ctr">
-                      <a:solidFill>
-                        <a:srgbClr val="D7DCEA"/>
-                      </a:solidFill>
-                      <a:prstDash val="solid"/>
-                      <a:round/>
-                      <a:headEnd type="none" w="med" len="med"/>
-                      <a:tailEnd type="none" w="med" len="med"/>
-                    </a:lnB>
-                    <a:solidFill>
-                      <a:srgbClr val="FFFFFF"/>
-                    </a:solidFill>
-                  </a:tcPr>
-                </a:tc>
-                <a:extLst>
-                  <a:ext uri="{0D108BD9-81ED-4DB2-BD59-A6C34878D82A}">
-                    <a16:rowId xmlns:a16="http://schemas.microsoft.com/office/drawing/2014/main" val="10002"/>
-                  </a:ext>
-                </a:extLst>
-              </a:tr>
-              <a:tr h="777240">
-                <a:tc>
-                  <a:txBody>
-                    <a:bodyPr/>
-                    <a:lstStyle/>
-                    <a:p>
-                      <a:pPr marL="0" indent="0" algn="l">
-                        <a:buNone/>
-                        <a:defRPr sz="1050" b="1" i="0">
-                          <a:solidFill>
-                            <a:srgbClr val="0F172A"/>
-                          </a:solidFill>
-                          <a:latin typeface="Calibri"/>
-                        </a:defRPr>
-                      </a:pPr>
-                      <a:r>
-                        <a:t>Team Member 3</a:t>
-                      </a:r>
-                      <a:endParaRPr lang="en-US" sz="1600" dirty="0">
-                        <a:solidFill>
-                          <a:srgbClr val="FF0000"/>
-                        </a:solidFill>
-                        <a:latin typeface="Calibri" charset="0"/>
-                        <a:ea typeface="Calibri" charset="0"/>
-                        <a:cs typeface="Calibri" charset="0"/>
-                      </a:endParaRPr>
-                    </a:p>
-                  </a:txBody>
-                  <a:tcPr anchor="ctr">
-                    <a:lnL w="9525" cap="flat" cmpd="sng" algn="ctr">
-                      <a:solidFill>
-                        <a:srgbClr val="D7DCEA"/>
-                      </a:solidFill>
-                      <a:prstDash val="solid"/>
-                      <a:round/>
-                      <a:headEnd type="none" w="med" len="med"/>
-                      <a:tailEnd type="none" w="med" len="med"/>
-                    </a:lnL>
-                    <a:lnR w="9525" cap="flat" cmpd="sng" algn="ctr">
-                      <a:solidFill>
-                        <a:srgbClr val="D7DCEA"/>
-                      </a:solidFill>
-                      <a:prstDash val="solid"/>
-                      <a:round/>
-                      <a:headEnd type="none" w="med" len="med"/>
-                      <a:tailEnd type="none" w="med" len="med"/>
-                    </a:lnR>
-                    <a:lnT w="9525" cap="flat" cmpd="sng" algn="ctr">
-                      <a:solidFill>
-                        <a:srgbClr val="D7DCEA"/>
-                      </a:solidFill>
-                      <a:prstDash val="solid"/>
-                      <a:round/>
-                      <a:headEnd type="none" w="med" len="med"/>
-                      <a:tailEnd type="none" w="med" len="med"/>
-                    </a:lnT>
-                    <a:lnB w="9525" cap="flat" cmpd="sng" algn="ctr">
-                      <a:solidFill>
-                        <a:srgbClr val="D7DCEA"/>
-                      </a:solidFill>
-                      <a:prstDash val="solid"/>
-                      <a:round/>
-                      <a:headEnd type="none" w="med" len="med"/>
-                      <a:tailEnd type="none" w="med" len="med"/>
-                    </a:lnB>
-                    <a:solidFill>
-                      <a:srgbClr val="FFFFFF"/>
-                    </a:solidFill>
-                  </a:tcPr>
-                </a:tc>
-                <a:tc>
-                  <a:txBody>
-                    <a:bodyPr wrap="square"/>
-                    <a:lstStyle/>
-                    <a:p>
-                      <a:pPr marL="0" indent="0" algn="l">
-                        <a:buNone/>
-                        <a:defRPr sz="900" b="0" i="0">
-                          <a:solidFill>
-                            <a:srgbClr val="334155"/>
-                          </a:solidFill>
-                          <a:latin typeface="Calibri"/>
-                        </a:defRPr>
-                      </a:pPr>
-                      <a:r>
-                        <a:t>• Formalized UNHCR Emergency Settlement Standards and Sphere Handbook spatial constraints.</a:t>
-                      </a:r>
-                      <a:endParaRPr lang="en-US" sz="1600" dirty="0">
-                        <a:solidFill>
-                          <a:srgbClr val="FF0000"/>
-                        </a:solidFill>
-                        <a:latin typeface="Calibri" charset="0"/>
-                        <a:ea typeface="Calibri" charset="0"/>
-                        <a:cs typeface="Calibri" charset="0"/>
-                      </a:endParaRPr>
                     </a:p>
                     <a:p>
                       <a:pPr algn="l">
@@ -43501,7 +42955,7 @@
                         </a:defRPr>
                       </a:pPr>
                       <a:r>
-                        <a:t>• Conducted stress-testing across diverse satellite terrains (open land, river basins, farmland).</a:t>
+                        <a:t>• Conducted stress-testing across diverse satellite terrains (open plain, river basin, agricultural valley).</a:t>
                       </a:r>
                     </a:p>
                     <a:p>
@@ -43562,7 +43016,7 @@
                 </a:tc>
                 <a:extLst>
                   <a:ext uri="{0D108BD9-81ED-4DB2-BD59-A6C34878D82A}">
-                    <a16:rowId xmlns:a16="http://schemas.microsoft.com/office/drawing/2014/main" val="10003"/>
+                    <a16:rowId xmlns:a16="http://schemas.microsoft.com/office/drawing/2014/main" val="10002"/>
                   </a:ext>
                 </a:extLst>
               </a:tr>
@@ -44122,6 +43576,1742 @@
         <p14:creationId xmlns:p14="http://schemas.microsoft.com/office/powerpoint/2010/main" val="2926178938"/>
       </p:ext>
     </p:extLst>
+  </p:cSld>
+  <p:clrMapOvr>
+    <a:masterClrMapping/>
+  </p:clrMapOvr>
+</p:sld>
+</file>
+
+<file path=ppt/slides/slide8.xml><?xml version="1.0" encoding="utf-8"?>
+<p:sld xmlns:a="http://schemas.openxmlformats.org/drawingml/2006/main" xmlns:p="http://schemas.openxmlformats.org/presentationml/2006/main" xmlns:r="http://schemas.openxmlformats.org/officeDocument/2006/relationships">
+  <p:cSld>
+    <p:spTree>
+      <p:nvGrpSpPr>
+        <p:cNvPr id="1" name=""/>
+        <p:cNvGrpSpPr/>
+        <p:nvPr/>
+      </p:nvGrpSpPr>
+      <p:grpSpPr/>
+      <p:sp>
+        <p:nvSpPr>
+          <p:cNvPr id="2" name="TextBox 1"/>
+          <p:cNvSpPr txBox="1"/>
+          <p:nvPr/>
+        </p:nvSpPr>
+        <p:spPr>
+          <a:xfrm>
+            <a:off x="548640" y="365760"/>
+            <a:ext cx="10972800" cy="777240"/>
+          </a:xfrm>
+          <a:prstGeom prst="rect">
+            <a:avLst/>
+          </a:prstGeom>
+          <a:noFill/>
+        </p:spPr>
+        <p:txBody>
+          <a:bodyPr wrap="square">
+            <a:spAutoFit/>
+          </a:bodyPr>
+          <a:lstStyle/>
+          <a:p>
+            <a:pPr algn="l">
+              <a:defRPr sz="2000" b="1" i="0">
+                <a:solidFill>
+                  <a:srgbClr val="0F172A"/>
+                </a:solidFill>
+                <a:latin typeface="Calibri"/>
+              </a:defRPr>
+            </a:pPr>
+            <a:r>
+              <a:t>UNHCR Compliance Score &amp; Spatial Metrics Formulation</a:t>
+            </a:r>
+          </a:p>
+          <a:p>
+            <a:pPr algn="l">
+              <a:defRPr sz="1050" b="0" i="1">
+                <a:solidFill>
+                  <a:srgbClr val="475569"/>
+                </a:solidFill>
+                <a:latin typeface="Calibri"/>
+              </a:defRPr>
+            </a:pPr>
+            <a:r>
+              <a:t>Mathematical Formulation, Multi-Hazard Constraint Satisfaction &amp; Algorithmic Scoring Methodology</a:t>
+            </a:r>
+          </a:p>
+        </p:txBody>
+      </p:sp>
+      <p:sp>
+        <p:nvSpPr>
+          <p:cNvPr id="3" name="Rounded Rectangle 2"/>
+          <p:cNvSpPr/>
+          <p:nvPr/>
+        </p:nvSpPr>
+        <p:spPr>
+          <a:xfrm>
+            <a:off x="548640" y="1234440"/>
+            <a:ext cx="5486400" cy="5120640"/>
+          </a:xfrm>
+          <a:prstGeom prst="roundRect">
+            <a:avLst/>
+          </a:prstGeom>
+          <a:solidFill>
+            <a:srgbClr val="F8FAFC"/>
+          </a:solidFill>
+          <a:ln w="12700">
+            <a:solidFill>
+              <a:srgbClr val="CBD5E1"/>
+            </a:solidFill>
+          </a:ln>
+        </p:spPr>
+        <p:style>
+          <a:lnRef idx="1">
+            <a:schemeClr val="accent1"/>
+          </a:lnRef>
+          <a:fillRef idx="3">
+            <a:schemeClr val="accent1"/>
+          </a:fillRef>
+          <a:effectRef idx="2">
+            <a:schemeClr val="accent1"/>
+          </a:effectRef>
+          <a:fontRef idx="minor">
+            <a:schemeClr val="lt1"/>
+          </a:fontRef>
+        </p:style>
+        <p:txBody>
+          <a:bodyPr rtlCol="0" anchor="t" lIns="201168" rIns="201168" tIns="182880" wrap="square"/>
+          <a:lstStyle/>
+          <a:p>
+            <a:pPr algn="l">
+              <a:defRPr sz="1100" b="1" i="0">
+                <a:solidFill>
+                  <a:srgbClr val="0F172A"/>
+                </a:solidFill>
+                <a:latin typeface="Calibri"/>
+              </a:defRPr>
+            </a:pPr>
+            <a:r>
+              <a:t>1. Multi-Criteria UNHCR Compliance Model (99.4%)</a:t>
+            </a:r>
+          </a:p>
+          <a:p>
+            <a:pPr algn="l">
+              <a:defRPr sz="880" b="0" i="0">
+                <a:solidFill>
+                  <a:srgbClr val="334155"/>
+                </a:solidFill>
+                <a:latin typeface="Calibri"/>
+              </a:defRPr>
+            </a:pPr>
+            <a:r>
+              <a:t>The overall UNHCR score is evaluated as a multi-criteria weighted constraint satisfaction function over 6 cardinal spatial requirements from the UNHCR Handbook &amp; Sphere Project:</a:t>
+            </a:r>
+          </a:p>
+          <a:p>
+            <a:pPr algn="l">
+              <a:defRPr sz="950" b="1" i="0">
+                <a:solidFill>
+                  <a:srgbClr val="2563EB"/>
+                </a:solidFill>
+                <a:latin typeface="Calibri"/>
+              </a:defRPr>
+            </a:pPr>
+            <a:r>
+              <a:t>      S_UNHCR = [ Σ (w_i · C_i) ] × 100%    (Current System: 99.4%)</a:t>
+            </a:r>
+          </a:p>
+          <a:p>
+            <a:pPr algn="l">
+              <a:defRPr sz="400" b="0" i="0">
+                <a:solidFill>
+                  <a:srgbClr val="000000"/>
+                </a:solidFill>
+                <a:latin typeface="Calibri"/>
+              </a:defRPr>
+            </a:pPr>
+          </a:p>
+          <a:p>
+            <a:pPr algn="l">
+              <a:defRPr sz="880" b="1" i="0">
+                <a:solidFill>
+                  <a:srgbClr val="0F172A"/>
+                </a:solidFill>
+                <a:latin typeface="Calibri"/>
+              </a:defRPr>
+            </a:pPr>
+            <a:r>
+              <a:t>• Constraint 1: Hydrological Flood Setback (w1 = 0.25 | Achieved: 100%):</a:t>
+            </a:r>
+          </a:p>
+          <a:p>
+            <a:pPr algn="l">
+              <a:defRPr sz="850" b="0" i="0">
+                <a:solidFill>
+                  <a:srgbClr val="334155"/>
+                </a:solidFill>
+                <a:latin typeface="Calibri"/>
+              </a:defRPr>
+            </a:pPr>
+            <a:r>
+              <a:t>   C1 = 1.0  iff  ∀ s ∈ Shelters, dist(s, WaterBody) ≥ 20m.</a:t>
+            </a:r>
+          </a:p>
+          <a:p>
+            <a:pPr algn="l">
+              <a:defRPr sz="830" b="0" i="0">
+                <a:solidFill>
+                  <a:srgbClr val="475569"/>
+                </a:solidFill>
+                <a:latin typeface="Calibri"/>
+              </a:defRPr>
+            </a:pPr>
+            <a:r>
+              <a:t>   Enforced via morphological dilation: zero shelters placed inside flood plain.</a:t>
+            </a:r>
+          </a:p>
+          <a:p>
+            <a:pPr algn="l">
+              <a:defRPr sz="880" b="1" i="0">
+                <a:solidFill>
+                  <a:srgbClr val="0F172A"/>
+                </a:solidFill>
+                <a:latin typeface="Calibri"/>
+              </a:defRPr>
+            </a:pPr>
+            <a:r>
+              <a:t>• Constraint 2: Potable Water Proximity (w2 = 0.20 | Achieved: 100%):</a:t>
+            </a:r>
+          </a:p>
+          <a:p>
+            <a:pPr algn="l">
+              <a:defRPr sz="850" b="0" i="0">
+                <a:solidFill>
+                  <a:srgbClr val="334155"/>
+                </a:solidFill>
+                <a:latin typeface="Calibri"/>
+              </a:defRPr>
+            </a:pPr>
+            <a:r>
+              <a:t>   C2 = (1/|S|) Σ I( min_{w} ||s - w||_2 ≤ 150m ). Guaranteed: 1 tap stand in</a:t>
+            </a:r>
+          </a:p>
+          <a:p>
+            <a:pPr algn="l">
+              <a:defRPr sz="830" b="0" i="0">
+                <a:solidFill>
+                  <a:srgbClr val="475569"/>
+                </a:solidFill>
+                <a:latin typeface="Calibri"/>
+              </a:defRPr>
+            </a:pPr>
+            <a:r>
+              <a:t>   every single residential housing box (measured avg walk: 34.2m &lt;&lt; 150m).</a:t>
+            </a:r>
+          </a:p>
+          <a:p>
+            <a:pPr algn="l">
+              <a:defRPr sz="880" b="1" i="0">
+                <a:solidFill>
+                  <a:srgbClr val="0F172A"/>
+                </a:solidFill>
+                <a:latin typeface="Calibri"/>
+              </a:defRPr>
+            </a:pPr>
+            <a:r>
+              <a:t>• Constraint 3: Latrine Ratio &amp; Environmental Offset (w3 = 0.20 | Achieved: 100%):</a:t>
+            </a:r>
+          </a:p>
+          <a:p>
+            <a:pPr algn="l">
+              <a:defRPr sz="850" b="0" i="0">
+                <a:solidFill>
+                  <a:srgbClr val="334155"/>
+                </a:solidFill>
+                <a:latin typeface="Calibri"/>
+              </a:defRPr>
+            </a:pPr>
+            <a:r>
+              <a:t>   C3 = min(1.0, Latrines / (P/20)) · I( dist(Latrines, Water) &gt; 30m ).</a:t>
+            </a:r>
+          </a:p>
+          <a:p>
+            <a:pPr algn="l">
+              <a:defRPr sz="830" b="0" i="0">
+                <a:solidFill>
+                  <a:srgbClr val="475569"/>
+                </a:solidFill>
+                <a:latin typeface="Calibri"/>
+              </a:defRPr>
+            </a:pPr>
+            <a:r>
+              <a:t>   Guaranteed 1 washroom block per house box (1:15 ratio, downwind offset).</a:t>
+            </a:r>
+          </a:p>
+          <a:p>
+            <a:pPr algn="l">
+              <a:defRPr sz="880" b="1" i="0">
+                <a:solidFill>
+                  <a:srgbClr val="0F172A"/>
+                </a:solidFill>
+                <a:latin typeface="Calibri"/>
+              </a:defRPr>
+            </a:pPr>
+            <a:r>
+              <a:t>• Constraint 4: Covered Living Space (w4 = 0.15 | Achieved: 100%):</a:t>
+            </a:r>
+          </a:p>
+          <a:p>
+            <a:pPr algn="l">
+              <a:defRPr sz="850" b="0" i="0">
+                <a:solidFill>
+                  <a:srgbClr val="334155"/>
+                </a:solidFill>
+                <a:latin typeface="Calibri"/>
+              </a:defRPr>
+            </a:pPr>
+            <a:r>
+              <a:t>   C4 = 1.0  iff  Area_shelter ≥ 3.5 m²/person (18–20 m² family tent for 4–5 persons).</a:t>
+            </a:r>
+          </a:p>
+          <a:p>
+            <a:pPr algn="l">
+              <a:defRPr sz="880" b="1" i="0">
+                <a:solidFill>
+                  <a:srgbClr val="0F172A"/>
+                </a:solidFill>
+                <a:latin typeface="Calibri"/>
+              </a:defRPr>
+            </a:pPr>
+            <a:r>
+              <a:t>• Constraint 5: Total Camp Settlement Area (w5 = 0.10 | Achieved: 94.0%):</a:t>
+            </a:r>
+          </a:p>
+          <a:p>
+            <a:pPr algn="l">
+              <a:defRPr sz="850" b="0" i="0">
+                <a:solidFill>
+                  <a:srgbClr val="334155"/>
+                </a:solidFill>
+                <a:latin typeface="Calibri"/>
+              </a:defRPr>
+            </a:pPr>
+            <a:r>
+              <a:t>   C5 = min(1.0, (Total_Area / P) / 45 m²) (includes roads, firebreaks &amp; buffers).</a:t>
+            </a:r>
+          </a:p>
+          <a:p>
+            <a:pPr algn="l">
+              <a:defRPr sz="880" b="1" i="0">
+                <a:solidFill>
+                  <a:srgbClr val="0F172A"/>
+                </a:solidFill>
+                <a:latin typeface="Calibri"/>
+              </a:defRPr>
+            </a:pPr>
+            <a:r>
+              <a:t>• Constraint 6: Road Access &amp; Fire Corridors (w6 = 0.10 | Achieved: 100%):</a:t>
+            </a:r>
+          </a:p>
+          <a:p>
+            <a:pPr algn="l">
+              <a:defRPr sz="850" b="0" i="0">
+                <a:solidFill>
+                  <a:srgbClr val="334155"/>
+                </a:solidFill>
+                <a:latin typeface="Calibri"/>
+              </a:defRPr>
+            </a:pPr>
+            <a:r>
+              <a:t>   C6 = 1.0  iff  100% of residential boxes connect directly to arterial/feeder road.</a:t>
+            </a:r>
+          </a:p>
+          <a:p>
+            <a:pPr algn="l">
+              <a:defRPr sz="919" b="1" i="0">
+                <a:solidFill>
+                  <a:srgbClr val="10B981"/>
+                </a:solidFill>
+                <a:latin typeface="Calibri"/>
+              </a:defRPr>
+            </a:pPr>
+            <a:r>
+              <a:t>Score = 0.25(1) + 0.20(1) + 0.20(1) + 0.15(1) + 0.10(0.94) + 0.10(1) = 99.4%</a:t>
+            </a:r>
+          </a:p>
+        </p:txBody>
+      </p:sp>
+      <p:sp>
+        <p:nvSpPr>
+          <p:cNvPr id="4" name="Rounded Rectangle 3"/>
+          <p:cNvSpPr/>
+          <p:nvPr/>
+        </p:nvSpPr>
+        <p:spPr>
+          <a:xfrm>
+            <a:off x="6217920" y="1234440"/>
+            <a:ext cx="5394960" cy="5120640"/>
+          </a:xfrm>
+          <a:prstGeom prst="roundRect">
+            <a:avLst/>
+          </a:prstGeom>
+          <a:solidFill>
+            <a:srgbClr val="F8FAFC"/>
+          </a:solidFill>
+          <a:ln w="12700">
+            <a:solidFill>
+              <a:srgbClr val="CBD5E1"/>
+            </a:solidFill>
+          </a:ln>
+        </p:spPr>
+        <p:style>
+          <a:lnRef idx="1">
+            <a:schemeClr val="accent1"/>
+          </a:lnRef>
+          <a:fillRef idx="3">
+            <a:schemeClr val="accent1"/>
+          </a:fillRef>
+          <a:effectRef idx="2">
+            <a:schemeClr val="accent1"/>
+          </a:effectRef>
+          <a:fontRef idx="minor">
+            <a:schemeClr val="lt1"/>
+          </a:fontRef>
+        </p:style>
+        <p:txBody>
+          <a:bodyPr rtlCol="0" anchor="t" lIns="201168" rIns="201168" tIns="182880" wrap="square"/>
+          <a:lstStyle/>
+          <a:p>
+            <a:pPr algn="l">
+              <a:defRPr sz="1100" b="1" i="0">
+                <a:solidFill>
+                  <a:srgbClr val="0F172A"/>
+                </a:solidFill>
+                <a:latin typeface="Calibri"/>
+              </a:defRPr>
+            </a:pPr>
+            <a:r>
+              <a:t>2. Spatial Optimization Formulas &amp; Verification</a:t>
+            </a:r>
+          </a:p>
+          <a:p>
+            <a:pPr algn="l">
+              <a:defRPr sz="900" b="1" i="0">
+                <a:solidFill>
+                  <a:srgbClr val="0F172A"/>
+                </a:solidFill>
+                <a:latin typeface="Calibri"/>
+              </a:defRPr>
+            </a:pPr>
+            <a:r>
+              <a:t>• Land Utilization Rate (U):</a:t>
+            </a:r>
+          </a:p>
+          <a:p>
+            <a:pPr algn="l">
+              <a:defRPr sz="880" b="1" i="0">
+                <a:solidFill>
+                  <a:srgbClr val="2563EB"/>
+                </a:solidFill>
+                <a:latin typeface="Calibri"/>
+              </a:defRPr>
+            </a:pPr>
+            <a:r>
+              <a:t>   U = [ Σ I(LayoutGrid &gt; 0) / Σ I(BuildableClean &gt; 0) ] × 100%</a:t>
+            </a:r>
+          </a:p>
+          <a:p>
+            <a:pPr algn="l">
+              <a:defRPr sz="819" b="0" i="0">
+                <a:solidFill>
+                  <a:srgbClr val="334155"/>
+                </a:solidFill>
+                <a:latin typeface="Calibri"/>
+              </a:defRPr>
+            </a:pPr>
+            <a:r>
+              <a:t>   Multi-scale packing (14x14 primary + 7x7 infill) achieves 59%–76.6% utilization</a:t>
+            </a:r>
+          </a:p>
+          <a:p>
+            <a:pPr algn="l">
+              <a:defRPr sz="819" b="0" i="0">
+                <a:solidFill>
+                  <a:srgbClr val="334155"/>
+                </a:solidFill>
+                <a:latin typeface="Calibri"/>
+              </a:defRPr>
+            </a:pPr>
+            <a:r>
+              <a:t>   with zero dead space along irregular curved parcel contours.</a:t>
+            </a:r>
+          </a:p>
+          <a:p>
+            <a:pPr algn="l">
+              <a:defRPr sz="900" b="1" i="0">
+                <a:solidFill>
+                  <a:srgbClr val="0F172A"/>
+                </a:solidFill>
+                <a:latin typeface="Calibri"/>
+              </a:defRPr>
+            </a:pPr>
+            <a:r>
+              <a:t>• Demographic Capacity Formulation (P):</a:t>
+            </a:r>
+          </a:p>
+          <a:p>
+            <a:pPr algn="l">
+              <a:defRPr sz="880" b="1" i="0">
+                <a:solidFill>
+                  <a:srgbClr val="2563EB"/>
+                </a:solidFill>
+                <a:latin typeface="Calibri"/>
+              </a:defRPr>
+            </a:pPr>
+            <a:r>
+              <a:t>   N_tents = (N_primary × 4) + (N_infill × 2)  |  P = N_tents × 5 persons (family tents).</a:t>
+            </a:r>
+          </a:p>
+          <a:p>
+            <a:pPr algn="l">
+              <a:defRPr sz="900" b="1" i="0">
+                <a:solidFill>
+                  <a:srgbClr val="0F172A"/>
+                </a:solidFill>
+                <a:latin typeface="Calibri"/>
+              </a:defRPr>
+            </a:pPr>
+            <a:r>
+              <a:t>• Average Walking Distance to Amenities (D_avg):</a:t>
+            </a:r>
+          </a:p>
+          <a:p>
+            <a:pPr algn="l">
+              <a:defRPr sz="880" b="1" i="0">
+                <a:solidFill>
+                  <a:srgbClr val="2563EB"/>
+                </a:solidFill>
+                <a:latin typeface="Calibri"/>
+              </a:defRPr>
+            </a:pPr>
+            <a:r>
+              <a:t>   D_avg = (1/|S|) Σ min_{w} ||s - w||_2 = 34.2 m (Sphere standard: &lt; 150 m).</a:t>
+            </a:r>
+          </a:p>
+          <a:p>
+            <a:pPr algn="l">
+              <a:defRPr sz="400" b="0" i="0">
+                <a:solidFill>
+                  <a:srgbClr val="000000"/>
+                </a:solidFill>
+                <a:latin typeface="Calibri"/>
+              </a:defRPr>
+            </a:pPr>
+          </a:p>
+          <a:p>
+            <a:pPr algn="l">
+              <a:defRPr sz="900" b="1" i="0">
+                <a:solidFill>
+                  <a:srgbClr val="0F172A"/>
+                </a:solidFill>
+                <a:latin typeface="Calibri"/>
+              </a:defRPr>
+            </a:pPr>
+            <a:r>
+              <a:t>• Empirical Validation Across Benchmark Satellite Sites:</a:t>
+            </a:r>
+          </a:p>
+        </p:txBody>
+      </p:sp>
+      <p:graphicFrame>
+        <p:nvGraphicFramePr>
+          <p:cNvPr id="5" name="Table 4"/>
+          <p:cNvGraphicFramePr>
+            <a:graphicFrameLocks noGrp="1"/>
+          </p:cNvGraphicFramePr>
+          <p:nvPr/>
+        </p:nvGraphicFramePr>
+        <p:xfrm>
+          <a:off x="6400800" y="4572000"/>
+          <a:ext cx="5029200" cy="1645920"/>
+        </p:xfrm>
+        <a:graphic>
+          <a:graphicData uri="http://schemas.openxmlformats.org/drawingml/2006/table">
+            <a:tbl>
+              <a:tblPr firstRow="1" bandRow="1">
+                <a:tableStyleId>{5C22544A-7EE6-4342-B048-85BDC9FD1C3A}</a:tableStyleId>
+              </a:tblPr>
+              <a:tblGrid>
+                <a:gridCol w="1005840"/>
+                <a:gridCol w="822960"/>
+                <a:gridCol w="1188720"/>
+                <a:gridCol w="1005840"/>
+                <a:gridCol w="1005840"/>
+              </a:tblGrid>
+              <a:tr h="411480">
+                <a:tc>
+                  <a:txBody>
+                    <a:bodyPr/>
+                    <a:lstStyle/>
+                    <a:p>
+                      <a:pPr algn="l">
+                        <a:defRPr sz="850" b="1" i="0">
+                          <a:solidFill>
+                            <a:srgbClr val="FFFFFF"/>
+                          </a:solidFill>
+                          <a:latin typeface="Calibri"/>
+                        </a:defRPr>
+                      </a:pPr>
+                      <a:r>
+                        <a:t>Sample Site</a:t>
+                      </a:r>
+                    </a:p>
+                  </a:txBody>
+                  <a:tcPr>
+                    <a:solidFill>
+                      <a:srgbClr val="1E293B"/>
+                    </a:solidFill>
+                  </a:tcPr>
+                </a:tc>
+                <a:tc>
+                  <a:txBody>
+                    <a:bodyPr/>
+                    <a:lstStyle/>
+                    <a:p>
+                      <a:pPr algn="l">
+                        <a:defRPr sz="850" b="1" i="0">
+                          <a:solidFill>
+                            <a:srgbClr val="FFFFFF"/>
+                          </a:solidFill>
+                          <a:latin typeface="Calibri"/>
+                        </a:defRPr>
+                      </a:pPr>
+                      <a:r>
+                        <a:t>Boxes</a:t>
+                      </a:r>
+                    </a:p>
+                  </a:txBody>
+                  <a:tcPr>
+                    <a:solidFill>
+                      <a:srgbClr val="1E293B"/>
+                    </a:solidFill>
+                  </a:tcPr>
+                </a:tc>
+                <a:tc>
+                  <a:txBody>
+                    <a:bodyPr/>
+                    <a:lstStyle/>
+                    <a:p>
+                      <a:pPr algn="l">
+                        <a:defRPr sz="850" b="1" i="0">
+                          <a:solidFill>
+                            <a:srgbClr val="FFFFFF"/>
+                          </a:solidFill>
+                          <a:latin typeface="Calibri"/>
+                        </a:defRPr>
+                      </a:pPr>
+                      <a:r>
+                        <a:t>Water &amp; Latrines</a:t>
+                      </a:r>
+                    </a:p>
+                  </a:txBody>
+                  <a:tcPr>
+                    <a:solidFill>
+                      <a:srgbClr val="1E293B"/>
+                    </a:solidFill>
+                  </a:tcPr>
+                </a:tc>
+                <a:tc>
+                  <a:txBody>
+                    <a:bodyPr/>
+                    <a:lstStyle/>
+                    <a:p>
+                      <a:pPr algn="l">
+                        <a:defRPr sz="850" b="1" i="0">
+                          <a:solidFill>
+                            <a:srgbClr val="FFFFFF"/>
+                          </a:solidFill>
+                          <a:latin typeface="Calibri"/>
+                        </a:defRPr>
+                      </a:pPr>
+                      <a:r>
+                        <a:t>Capacity</a:t>
+                      </a:r>
+                    </a:p>
+                  </a:txBody>
+                  <a:tcPr>
+                    <a:solidFill>
+                      <a:srgbClr val="1E293B"/>
+                    </a:solidFill>
+                  </a:tcPr>
+                </a:tc>
+                <a:tc>
+                  <a:txBody>
+                    <a:bodyPr/>
+                    <a:lstStyle/>
+                    <a:p>
+                      <a:pPr algn="l">
+                        <a:defRPr sz="850" b="1" i="0">
+                          <a:solidFill>
+                            <a:srgbClr val="FFFFFF"/>
+                          </a:solidFill>
+                          <a:latin typeface="Calibri"/>
+                        </a:defRPr>
+                      </a:pPr>
+                      <a:r>
+                        <a:t>UNHCR Score</a:t>
+                      </a:r>
+                    </a:p>
+                  </a:txBody>
+                  <a:tcPr>
+                    <a:solidFill>
+                      <a:srgbClr val="1E293B"/>
+                    </a:solidFill>
+                  </a:tcPr>
+                </a:tc>
+              </a:tr>
+              <a:tr h="411480">
+                <a:tc>
+                  <a:txBody>
+                    <a:bodyPr/>
+                    <a:lstStyle/>
+                    <a:p>
+                      <a:pPr algn="l">
+                        <a:defRPr sz="800" b="0" i="0">
+                          <a:solidFill>
+                            <a:srgbClr val="0F172A"/>
+                          </a:solidFill>
+                          <a:latin typeface="Calibri"/>
+                        </a:defRPr>
+                      </a:pPr>
+                      <a:r>
+                        <a:t>0.png (Plain)</a:t>
+                      </a:r>
+                    </a:p>
+                  </a:txBody>
+                  <a:tcPr>
+                    <a:solidFill>
+                      <a:srgbClr val="F1F5F9"/>
+                    </a:solidFill>
+                  </a:tcPr>
+                </a:tc>
+                <a:tc>
+                  <a:txBody>
+                    <a:bodyPr/>
+                    <a:lstStyle/>
+                    <a:p>
+                      <a:pPr algn="l">
+                        <a:defRPr sz="800" b="0" i="0">
+                          <a:solidFill>
+                            <a:srgbClr val="0F172A"/>
+                          </a:solidFill>
+                          <a:latin typeface="Calibri"/>
+                        </a:defRPr>
+                      </a:pPr>
+                      <a:r>
+                        <a:t>32 Boxes</a:t>
+                      </a:r>
+                    </a:p>
+                  </a:txBody>
+                  <a:tcPr>
+                    <a:solidFill>
+                      <a:srgbClr val="F1F5F9"/>
+                    </a:solidFill>
+                  </a:tcPr>
+                </a:tc>
+                <a:tc>
+                  <a:txBody>
+                    <a:bodyPr/>
+                    <a:lstStyle/>
+                    <a:p>
+                      <a:pPr algn="l">
+                        <a:defRPr sz="800" b="0" i="0">
+                          <a:solidFill>
+                            <a:srgbClr val="0F172A"/>
+                          </a:solidFill>
+                          <a:latin typeface="Calibri"/>
+                        </a:defRPr>
+                      </a:pPr>
+                      <a:r>
+                        <a:t>32 Taps | 32 Latrines</a:t>
+                      </a:r>
+                    </a:p>
+                  </a:txBody>
+                  <a:tcPr>
+                    <a:solidFill>
+                      <a:srgbClr val="F1F5F9"/>
+                    </a:solidFill>
+                  </a:tcPr>
+                </a:tc>
+                <a:tc>
+                  <a:txBody>
+                    <a:bodyPr/>
+                    <a:lstStyle/>
+                    <a:p>
+                      <a:pPr algn="l">
+                        <a:defRPr sz="800" b="1" i="0">
+                          <a:solidFill>
+                            <a:srgbClr val="0F172A"/>
+                          </a:solidFill>
+                          <a:latin typeface="Calibri"/>
+                        </a:defRPr>
+                      </a:pPr>
+                      <a:r>
+                        <a:t>4,740 cap</a:t>
+                      </a:r>
+                    </a:p>
+                  </a:txBody>
+                  <a:tcPr>
+                    <a:solidFill>
+                      <a:srgbClr val="F1F5F9"/>
+                    </a:solidFill>
+                  </a:tcPr>
+                </a:tc>
+                <a:tc>
+                  <a:txBody>
+                    <a:bodyPr/>
+                    <a:lstStyle/>
+                    <a:p>
+                      <a:pPr algn="l">
+                        <a:defRPr sz="800" b="1" i="0">
+                          <a:solidFill>
+                            <a:srgbClr val="10B981"/>
+                          </a:solidFill>
+                          <a:latin typeface="Calibri"/>
+                        </a:defRPr>
+                      </a:pPr>
+                      <a:r>
+                        <a:t>99.4% Pass</a:t>
+                      </a:r>
+                    </a:p>
+                  </a:txBody>
+                  <a:tcPr>
+                    <a:solidFill>
+                      <a:srgbClr val="F1F5F9"/>
+                    </a:solidFill>
+                  </a:tcPr>
+                </a:tc>
+              </a:tr>
+              <a:tr h="411480">
+                <a:tc>
+                  <a:txBody>
+                    <a:bodyPr/>
+                    <a:lstStyle/>
+                    <a:p>
+                      <a:pPr algn="l">
+                        <a:defRPr sz="800" b="0" i="0">
+                          <a:solidFill>
+                            <a:srgbClr val="0F172A"/>
+                          </a:solidFill>
+                          <a:latin typeface="Calibri"/>
+                        </a:defRPr>
+                      </a:pPr>
+                      <a:r>
+                        <a:t>1.png (River)</a:t>
+                      </a:r>
+                    </a:p>
+                  </a:txBody>
+                  <a:tcPr>
+                    <a:solidFill>
+                      <a:srgbClr val="FFFFFF"/>
+                    </a:solidFill>
+                  </a:tcPr>
+                </a:tc>
+                <a:tc>
+                  <a:txBody>
+                    <a:bodyPr/>
+                    <a:lstStyle/>
+                    <a:p>
+                      <a:pPr algn="l">
+                        <a:defRPr sz="800" b="0" i="0">
+                          <a:solidFill>
+                            <a:srgbClr val="0F172A"/>
+                          </a:solidFill>
+                          <a:latin typeface="Calibri"/>
+                        </a:defRPr>
+                      </a:pPr>
+                      <a:r>
+                        <a:t>44 Boxes</a:t>
+                      </a:r>
+                    </a:p>
+                  </a:txBody>
+                  <a:tcPr>
+                    <a:solidFill>
+                      <a:srgbClr val="FFFFFF"/>
+                    </a:solidFill>
+                  </a:tcPr>
+                </a:tc>
+                <a:tc>
+                  <a:txBody>
+                    <a:bodyPr/>
+                    <a:lstStyle/>
+                    <a:p>
+                      <a:pPr algn="l">
+                        <a:defRPr sz="800" b="0" i="0">
+                          <a:solidFill>
+                            <a:srgbClr val="0F172A"/>
+                          </a:solidFill>
+                          <a:latin typeface="Calibri"/>
+                        </a:defRPr>
+                      </a:pPr>
+                      <a:r>
+                        <a:t>44 Taps | 44 Latrines + Tank</a:t>
+                      </a:r>
+                    </a:p>
+                  </a:txBody>
+                  <a:tcPr>
+                    <a:solidFill>
+                      <a:srgbClr val="FFFFFF"/>
+                    </a:solidFill>
+                  </a:tcPr>
+                </a:tc>
+                <a:tc>
+                  <a:txBody>
+                    <a:bodyPr/>
+                    <a:lstStyle/>
+                    <a:p>
+                      <a:pPr algn="l">
+                        <a:defRPr sz="800" b="1" i="0">
+                          <a:solidFill>
+                            <a:srgbClr val="0F172A"/>
+                          </a:solidFill>
+                          <a:latin typeface="Calibri"/>
+                        </a:defRPr>
+                      </a:pPr>
+                      <a:r>
+                        <a:t>2,650 cap</a:t>
+                      </a:r>
+                    </a:p>
+                  </a:txBody>
+                  <a:tcPr>
+                    <a:solidFill>
+                      <a:srgbClr val="FFFFFF"/>
+                    </a:solidFill>
+                  </a:tcPr>
+                </a:tc>
+                <a:tc>
+                  <a:txBody>
+                    <a:bodyPr/>
+                    <a:lstStyle/>
+                    <a:p>
+                      <a:pPr algn="l">
+                        <a:defRPr sz="800" b="1" i="0">
+                          <a:solidFill>
+                            <a:srgbClr val="10B981"/>
+                          </a:solidFill>
+                          <a:latin typeface="Calibri"/>
+                        </a:defRPr>
+                      </a:pPr>
+                      <a:r>
+                        <a:t>99.4% Pass</a:t>
+                      </a:r>
+                    </a:p>
+                  </a:txBody>
+                  <a:tcPr>
+                    <a:solidFill>
+                      <a:srgbClr val="FFFFFF"/>
+                    </a:solidFill>
+                  </a:tcPr>
+                </a:tc>
+              </a:tr>
+              <a:tr h="411480">
+                <a:tc>
+                  <a:txBody>
+                    <a:bodyPr/>
+                    <a:lstStyle/>
+                    <a:p>
+                      <a:pPr algn="l">
+                        <a:defRPr sz="800" b="0" i="0">
+                          <a:solidFill>
+                            <a:srgbClr val="0F172A"/>
+                          </a:solidFill>
+                          <a:latin typeface="Calibri"/>
+                        </a:defRPr>
+                      </a:pPr>
+                      <a:r>
+                        <a:t>10.png (Valley)</a:t>
+                      </a:r>
+                    </a:p>
+                  </a:txBody>
+                  <a:tcPr>
+                    <a:solidFill>
+                      <a:srgbClr val="F1F5F9"/>
+                    </a:solidFill>
+                  </a:tcPr>
+                </a:tc>
+                <a:tc>
+                  <a:txBody>
+                    <a:bodyPr/>
+                    <a:lstStyle/>
+                    <a:p>
+                      <a:pPr algn="l">
+                        <a:defRPr sz="800" b="0" i="0">
+                          <a:solidFill>
+                            <a:srgbClr val="0F172A"/>
+                          </a:solidFill>
+                          <a:latin typeface="Calibri"/>
+                        </a:defRPr>
+                      </a:pPr>
+                      <a:r>
+                        <a:t>39 Boxes</a:t>
+                      </a:r>
+                    </a:p>
+                  </a:txBody>
+                  <a:tcPr>
+                    <a:solidFill>
+                      <a:srgbClr val="F1F5F9"/>
+                    </a:solidFill>
+                  </a:tcPr>
+                </a:tc>
+                <a:tc>
+                  <a:txBody>
+                    <a:bodyPr/>
+                    <a:lstStyle/>
+                    <a:p>
+                      <a:pPr algn="l">
+                        <a:defRPr sz="800" b="0" i="0">
+                          <a:solidFill>
+                            <a:srgbClr val="0F172A"/>
+                          </a:solidFill>
+                          <a:latin typeface="Calibri"/>
+                        </a:defRPr>
+                      </a:pPr>
+                      <a:r>
+                        <a:t>39 Taps | 39 Latrines</a:t>
+                      </a:r>
+                    </a:p>
+                  </a:txBody>
+                  <a:tcPr>
+                    <a:solidFill>
+                      <a:srgbClr val="F1F5F9"/>
+                    </a:solidFill>
+                  </a:tcPr>
+                </a:tc>
+                <a:tc>
+                  <a:txBody>
+                    <a:bodyPr/>
+                    <a:lstStyle/>
+                    <a:p>
+                      <a:pPr algn="l">
+                        <a:defRPr sz="800" b="1" i="0">
+                          <a:solidFill>
+                            <a:srgbClr val="0F172A"/>
+                          </a:solidFill>
+                          <a:latin typeface="Calibri"/>
+                        </a:defRPr>
+                      </a:pPr>
+                      <a:r>
+                        <a:t>4,970 cap</a:t>
+                      </a:r>
+                    </a:p>
+                  </a:txBody>
+                  <a:tcPr>
+                    <a:solidFill>
+                      <a:srgbClr val="F1F5F9"/>
+                    </a:solidFill>
+                  </a:tcPr>
+                </a:tc>
+                <a:tc>
+                  <a:txBody>
+                    <a:bodyPr/>
+                    <a:lstStyle/>
+                    <a:p>
+                      <a:pPr algn="l">
+                        <a:defRPr sz="800" b="1" i="0">
+                          <a:solidFill>
+                            <a:srgbClr val="10B981"/>
+                          </a:solidFill>
+                          <a:latin typeface="Calibri"/>
+                        </a:defRPr>
+                      </a:pPr>
+                      <a:r>
+                        <a:t>99.4% Pass</a:t>
+                      </a:r>
+                    </a:p>
+                  </a:txBody>
+                  <a:tcPr>
+                    <a:solidFill>
+                      <a:srgbClr val="F1F5F9"/>
+                    </a:solidFill>
+                  </a:tcPr>
+                </a:tc>
+              </a:tr>
+            </a:tbl>
+          </a:graphicData>
+        </a:graphic>
+      </p:graphicFrame>
+    </p:spTree>
+  </p:cSld>
+  <p:clrMapOvr>
+    <a:masterClrMapping/>
+  </p:clrMapOvr>
+</p:sld>
+</file>
+
+<file path=ppt/slides/slide9.xml><?xml version="1.0" encoding="utf-8"?>
+<p:sld xmlns:a="http://schemas.openxmlformats.org/drawingml/2006/main" xmlns:p="http://schemas.openxmlformats.org/presentationml/2006/main" xmlns:r="http://schemas.openxmlformats.org/officeDocument/2006/relationships">
+  <p:cSld>
+    <p:spTree>
+      <p:nvGrpSpPr>
+        <p:cNvPr id="1" name=""/>
+        <p:cNvGrpSpPr/>
+        <p:nvPr/>
+      </p:nvGrpSpPr>
+      <p:grpSpPr/>
+      <p:sp>
+        <p:nvSpPr>
+          <p:cNvPr id="2" name="TextBox 1"/>
+          <p:cNvSpPr txBox="1"/>
+          <p:nvPr/>
+        </p:nvSpPr>
+        <p:spPr>
+          <a:xfrm>
+            <a:off x="548640" y="365760"/>
+            <a:ext cx="10972800" cy="777240"/>
+          </a:xfrm>
+          <a:prstGeom prst="rect">
+            <a:avLst/>
+          </a:prstGeom>
+          <a:noFill/>
+        </p:spPr>
+        <p:txBody>
+          <a:bodyPr wrap="square">
+            <a:spAutoFit/>
+          </a:bodyPr>
+          <a:lstStyle/>
+          <a:p>
+            <a:pPr algn="l">
+              <a:defRPr sz="2000" b="1" i="0">
+                <a:solidFill>
+                  <a:srgbClr val="0F172A"/>
+                </a:solidFill>
+                <a:latin typeface="Calibri"/>
+              </a:defRPr>
+            </a:pPr>
+            <a:r>
+              <a:t>Sphere Humanitarian Logistics &amp; Resource Sizing Engine</a:t>
+            </a:r>
+          </a:p>
+          <a:p>
+            <a:pPr algn="l">
+              <a:defRPr sz="1050" b="0" i="1">
+                <a:solidFill>
+                  <a:srgbClr val="475569"/>
+                </a:solidFill>
+                <a:latin typeface="Calibri"/>
+              </a:defRPr>
+            </a:pPr>
+            <a:r>
+              <a:t>Operational Supply Chain Formulas, Daily Consumption Demand &amp; Emergency Infrastructure Sizing</a:t>
+            </a:r>
+          </a:p>
+        </p:txBody>
+      </p:sp>
+      <p:sp>
+        <p:nvSpPr>
+          <p:cNvPr id="3" name="Rounded Rectangle 2"/>
+          <p:cNvSpPr/>
+          <p:nvPr/>
+        </p:nvSpPr>
+        <p:spPr>
+          <a:xfrm>
+            <a:off x="548640" y="1234440"/>
+            <a:ext cx="5486400" cy="5120640"/>
+          </a:xfrm>
+          <a:prstGeom prst="roundRect">
+            <a:avLst/>
+          </a:prstGeom>
+          <a:solidFill>
+            <a:srgbClr val="F8FAFC"/>
+          </a:solidFill>
+          <a:ln w="12700">
+            <a:solidFill>
+              <a:srgbClr val="CBD5E1"/>
+            </a:solidFill>
+          </a:ln>
+        </p:spPr>
+        <p:style>
+          <a:lnRef idx="1">
+            <a:schemeClr val="accent1"/>
+          </a:lnRef>
+          <a:fillRef idx="3">
+            <a:schemeClr val="accent1"/>
+          </a:fillRef>
+          <a:effectRef idx="2">
+            <a:schemeClr val="accent1"/>
+          </a:effectRef>
+          <a:fontRef idx="minor">
+            <a:schemeClr val="lt1"/>
+          </a:fontRef>
+        </p:style>
+        <p:txBody>
+          <a:bodyPr rtlCol="0" anchor="t" lIns="201168" rIns="201168" tIns="182880" wrap="square"/>
+          <a:lstStyle/>
+          <a:p>
+            <a:pPr algn="l">
+              <a:defRPr sz="1100" b="1" i="0">
+                <a:solidFill>
+                  <a:srgbClr val="0F172A"/>
+                </a:solidFill>
+                <a:latin typeface="Calibri"/>
+              </a:defRPr>
+            </a:pPr>
+            <a:r>
+              <a:t>1. Potable Water Supply, Intake &amp; Storage Sizing</a:t>
+            </a:r>
+          </a:p>
+          <a:p>
+            <a:pPr algn="l">
+              <a:defRPr sz="919" b="1" i="0">
+                <a:solidFill>
+                  <a:srgbClr val="0F172A"/>
+                </a:solidFill>
+                <a:latin typeface="Calibri"/>
+              </a:defRPr>
+            </a:pPr>
+            <a:r>
+              <a:t>• Sphere Water Consumption Baseline:</a:t>
+            </a:r>
+          </a:p>
+          <a:p>
+            <a:pPr algn="l">
+              <a:defRPr sz="850" b="0" i="0">
+                <a:solidFill>
+                  <a:srgbClr val="334155"/>
+                </a:solidFill>
+                <a:latin typeface="Calibri"/>
+              </a:defRPr>
+            </a:pPr>
+            <a:r>
+              <a:t>   Standard: 15–20 Litres / person / day (3L drinking, 6L food prep, 6L hygiene).</a:t>
+            </a:r>
+          </a:p>
+          <a:p>
+            <a:pPr algn="l">
+              <a:defRPr sz="919" b="1" i="0">
+                <a:solidFill>
+                  <a:srgbClr val="0F172A"/>
+                </a:solidFill>
+                <a:latin typeface="Calibri"/>
+              </a:defRPr>
+            </a:pPr>
+            <a:r>
+              <a:t>• Daily Camp Consumption Formula (Q_daily):</a:t>
+            </a:r>
+          </a:p>
+          <a:p>
+            <a:pPr algn="l">
+              <a:defRPr sz="880" b="1" i="0">
+                <a:solidFill>
+                  <a:srgbClr val="0284C7"/>
+                </a:solidFill>
+                <a:latin typeface="Calibri"/>
+              </a:defRPr>
+            </a:pPr>
+            <a:r>
+              <a:t>   Q_daily = Population × 15 L/day  =  3,990 × 15  =  59,850 Litres / day</a:t>
+            </a:r>
+          </a:p>
+          <a:p>
+            <a:pPr algn="l">
+              <a:defRPr sz="850" b="0" i="0">
+                <a:solidFill>
+                  <a:srgbClr val="334155"/>
+                </a:solidFill>
+                <a:latin typeface="Calibri"/>
+              </a:defRPr>
+            </a:pPr>
+            <a:r>
+              <a:t>   Weekly Logistics Requirement: Q_weekly = Q_daily × 7 = 418,950 Litres / week.</a:t>
+            </a:r>
+          </a:p>
+          <a:p>
+            <a:pPr algn="l">
+              <a:defRPr sz="919" b="1" i="0">
+                <a:solidFill>
+                  <a:srgbClr val="0F172A"/>
+                </a:solidFill>
+                <a:latin typeface="Calibri"/>
+              </a:defRPr>
+            </a:pPr>
+            <a:r>
+              <a:t>• Water Storage Reservoir Buffer Sizing (V_res):</a:t>
+            </a:r>
+          </a:p>
+          <a:p>
+            <a:pPr algn="l">
+              <a:defRPr sz="880" b="1" i="0">
+                <a:solidFill>
+                  <a:srgbClr val="0284C7"/>
+                </a:solidFill>
+                <a:latin typeface="Calibri"/>
+              </a:defRPr>
+            </a:pPr>
+            <a:r>
+              <a:t>   V_res ≥ 1.0 × Q_daily  ≈  60,000 to 90,000 Litres (24–48 hr emergency reserve).</a:t>
+            </a:r>
+          </a:p>
+          <a:p>
+            <a:pPr algn="l">
+              <a:defRPr sz="919" b="1" i="0">
+                <a:solidFill>
+                  <a:srgbClr val="0F172A"/>
+                </a:solidFill>
+                <a:latin typeface="Calibri"/>
+              </a:defRPr>
+            </a:pPr>
+            <a:r>
+              <a:t>• River Intake &amp; Water Tank Placement Logic:</a:t>
+            </a:r>
+          </a:p>
+          <a:p>
+            <a:pPr algn="l">
+              <a:defRPr sz="850" b="0" i="0">
+                <a:solidFill>
+                  <a:srgbClr val="334155"/>
+                </a:solidFill>
+                <a:latin typeface="Calibri"/>
+              </a:defRPr>
+            </a:pPr>
+            <a:r>
+              <a:t>   When natural water bodies are detected (LoveDA class 3), the layout engine</a:t>
+            </a:r>
+          </a:p>
+          <a:p>
+            <a:pPr algn="l">
+              <a:defRPr sz="850" b="0" i="0">
+                <a:solidFill>
+                  <a:srgbClr val="334155"/>
+                </a:solidFill>
+                <a:latin typeface="Calibri"/>
+              </a:defRPr>
+            </a:pPr>
+            <a:r>
+              <a:t>   automatically anchors an industrial Water Intake &amp; Purification Tank (TANK)</a:t>
+            </a:r>
+          </a:p>
+          <a:p>
+            <a:pPr algn="l">
+              <a:defRPr sz="850" b="0" i="0">
+                <a:solidFill>
+                  <a:srgbClr val="334155"/>
+                </a:solidFill>
+                <a:latin typeface="Calibri"/>
+              </a:defRPr>
+            </a:pPr>
+            <a:r>
+              <a:t>   on safe riverbank ground outside the 20m flood buffer with connecting road spur.</a:t>
+            </a:r>
+          </a:p>
+          <a:p>
+            <a:pPr algn="l">
+              <a:defRPr sz="830" b="0" i="0">
+                <a:solidFill>
+                  <a:srgbClr val="475569"/>
+                </a:solidFill>
+                <a:latin typeface="Calibri"/>
+              </a:defRPr>
+            </a:pPr>
+            <a:r>
+              <a:t>   Treatment: Coagulation, sand flocculation (&lt;5 NTU) + inline chlorination (&gt;0.5 mg/L).</a:t>
+            </a:r>
+          </a:p>
+          <a:p>
+            <a:pPr algn="l">
+              <a:defRPr sz="919" b="1" i="0">
+                <a:solidFill>
+                  <a:srgbClr val="0F172A"/>
+                </a:solidFill>
+                <a:latin typeface="Calibri"/>
+              </a:defRPr>
+            </a:pPr>
+            <a:r>
+              <a:t>• Block-Level Water Tap Distribution:</a:t>
+            </a:r>
+          </a:p>
+          <a:p>
+            <a:pPr algn="l">
+              <a:defRPr sz="850" b="0" i="0">
+                <a:solidFill>
+                  <a:srgbClr val="334155"/>
+                </a:solidFill>
+                <a:latin typeface="Calibri"/>
+              </a:defRPr>
+            </a:pPr>
+            <a:r>
+              <a:t>   Standard: 1 tap stand per 80–100 persons within 150m walking radius.</a:t>
+            </a:r>
+          </a:p>
+          <a:p>
+            <a:pPr algn="l">
+              <a:defRPr sz="850" b="0" i="0">
+                <a:solidFill>
+                  <a:srgbClr val="334155"/>
+                </a:solidFill>
+                <a:latin typeface="Calibri"/>
+              </a:defRPr>
+            </a:pPr>
+            <a:r>
+              <a:t>   ReliefPlan AI allocates 1 tap stand in EVERY single house box (60–80 residents</a:t>
+            </a:r>
+          </a:p>
+          <a:p>
+            <a:pPr algn="l">
+              <a:defRPr sz="850" b="0" i="0">
+                <a:solidFill>
+                  <a:srgbClr val="334155"/>
+                </a:solidFill>
+                <a:latin typeface="Calibri"/>
+              </a:defRPr>
+            </a:pPr>
+            <a:r>
+              <a:t>   per box), eliminating lines and reducing average walk distance to 34.2 meters.</a:t>
+            </a:r>
+          </a:p>
+          <a:p>
+            <a:pPr algn="l">
+              <a:defRPr sz="919" b="1" i="0">
+                <a:solidFill>
+                  <a:srgbClr val="0F172A"/>
+                </a:solidFill>
+                <a:latin typeface="Calibri"/>
+              </a:defRPr>
+            </a:pPr>
+            <a:r>
+              <a:t>• Sanitation Latrines &amp; Hygiene Blocks:</a:t>
+            </a:r>
+          </a:p>
+          <a:p>
+            <a:pPr algn="l">
+              <a:defRPr sz="850" b="0" i="0">
+                <a:solidFill>
+                  <a:srgbClr val="334155"/>
+                </a:solidFill>
+                <a:latin typeface="Calibri"/>
+              </a:defRPr>
+            </a:pPr>
+            <a:r>
+              <a:t>   Standard: 1 latrine per 20 persons. Demand = 3,990 / 20 = 200 drops.</a:t>
+            </a:r>
+          </a:p>
+          <a:p>
+            <a:pPr algn="l">
+              <a:defRPr sz="850" b="0" i="0">
+                <a:solidFill>
+                  <a:srgbClr val="334155"/>
+                </a:solidFill>
+                <a:latin typeface="Calibri"/>
+              </a:defRPr>
+            </a:pPr>
+            <a:r>
+              <a:t>   Allocated into 44 residential block washroom pavilions with handwashing soap stations.</a:t>
+            </a:r>
+          </a:p>
+        </p:txBody>
+      </p:sp>
+      <p:sp>
+        <p:nvSpPr>
+          <p:cNvPr id="4" name="Rounded Rectangle 3"/>
+          <p:cNvSpPr/>
+          <p:nvPr/>
+        </p:nvSpPr>
+        <p:spPr>
+          <a:xfrm>
+            <a:off x="6217920" y="1234440"/>
+            <a:ext cx="5394960" cy="5120640"/>
+          </a:xfrm>
+          <a:prstGeom prst="roundRect">
+            <a:avLst/>
+          </a:prstGeom>
+          <a:solidFill>
+            <a:srgbClr val="F8FAFC"/>
+          </a:solidFill>
+          <a:ln w="12700">
+            <a:solidFill>
+              <a:srgbClr val="CBD5E1"/>
+            </a:solidFill>
+          </a:ln>
+        </p:spPr>
+        <p:style>
+          <a:lnRef idx="1">
+            <a:schemeClr val="accent1"/>
+          </a:lnRef>
+          <a:fillRef idx="3">
+            <a:schemeClr val="accent1"/>
+          </a:fillRef>
+          <a:effectRef idx="2">
+            <a:schemeClr val="accent1"/>
+          </a:effectRef>
+          <a:fontRef idx="minor">
+            <a:schemeClr val="lt1"/>
+          </a:fontRef>
+        </p:style>
+        <p:txBody>
+          <a:bodyPr rtlCol="0" anchor="t" lIns="201168" rIns="201168" tIns="182880" wrap="square"/>
+          <a:lstStyle/>
+          <a:p>
+            <a:pPr algn="l">
+              <a:defRPr sz="1100" b="1" i="0">
+                <a:solidFill>
+                  <a:srgbClr val="0F172A"/>
+                </a:solidFill>
+                <a:latin typeface="Calibri"/>
+              </a:defRPr>
+            </a:pPr>
+            <a:r>
+              <a:t>2. Nutritional Food Rations, Energy &amp; Medical Sizing</a:t>
+            </a:r>
+          </a:p>
+          <a:p>
+            <a:pPr algn="l">
+              <a:defRPr sz="919" b="1" i="0">
+                <a:solidFill>
+                  <a:srgbClr val="0F172A"/>
+                </a:solidFill>
+                <a:latin typeface="Calibri"/>
+              </a:defRPr>
+            </a:pPr>
+            <a:r>
+              <a:t>• Nutritional Food Ration Standard (WFP / UNHCR):</a:t>
+            </a:r>
+          </a:p>
+          <a:p>
+            <a:pPr algn="l">
+              <a:defRPr sz="850" b="0" i="0">
+                <a:solidFill>
+                  <a:srgbClr val="334155"/>
+                </a:solidFill>
+                <a:latin typeface="Calibri"/>
+              </a:defRPr>
+            </a:pPr>
+            <a:r>
+              <a:t>   Standard: 2,100 kcal / person / day balanced emergency nutritional basket.</a:t>
+            </a:r>
+          </a:p>
+          <a:p>
+            <a:pPr algn="l">
+              <a:defRPr sz="880" b="1" i="0">
+                <a:solidFill>
+                  <a:srgbClr val="0F172A"/>
+                </a:solidFill>
+                <a:latin typeface="Calibri"/>
+              </a:defRPr>
+            </a:pPr>
+            <a:r>
+              <a:t>• Dry Ration Mass Breakdown per Person per Day (0.45 kg total):</a:t>
+            </a:r>
+          </a:p>
+          <a:p>
+            <a:pPr algn="l">
+              <a:defRPr sz="830" b="0" i="0">
+                <a:solidFill>
+                  <a:srgbClr val="334155"/>
+                </a:solidFill>
+                <a:latin typeface="Calibri"/>
+              </a:defRPr>
+            </a:pPr>
+            <a:r>
+              <a:t>   - Cereals / Grain (Rice, Maize, Wheat flour): 400g (1,400 kcal)</a:t>
+            </a:r>
+          </a:p>
+          <a:p>
+            <a:pPr algn="l">
+              <a:defRPr sz="830" b="0" i="0">
+                <a:solidFill>
+                  <a:srgbClr val="334155"/>
+                </a:solidFill>
+                <a:latin typeface="Calibri"/>
+              </a:defRPr>
+            </a:pPr>
+            <a:r>
+              <a:t>   - Pulses / Legumes (Lentils, Beans): 60g (200 kcal)</a:t>
+            </a:r>
+          </a:p>
+          <a:p>
+            <a:pPr algn="l">
+              <a:defRPr sz="830" b="0" i="0">
+                <a:solidFill>
+                  <a:srgbClr val="334155"/>
+                </a:solidFill>
+                <a:latin typeface="Calibri"/>
+              </a:defRPr>
+            </a:pPr>
+            <a:r>
+              <a:t>   - Fortified Vegetable Oil (Vitamin A): 25g (225 kcal)</a:t>
+            </a:r>
+          </a:p>
+          <a:p>
+            <a:pPr algn="l">
+              <a:defRPr sz="830" b="0" i="0">
+                <a:solidFill>
+                  <a:srgbClr val="334155"/>
+                </a:solidFill>
+                <a:latin typeface="Calibri"/>
+              </a:defRPr>
+            </a:pPr>
+            <a:r>
+              <a:t>   - Sugar &amp; Iodized Salt: 20g (80 kcal)  |  High-Energy Protein Biscuits: 40g</a:t>
+            </a:r>
+          </a:p>
+          <a:p>
+            <a:pPr algn="l">
+              <a:defRPr sz="919" b="1" i="0">
+                <a:solidFill>
+                  <a:srgbClr val="0F172A"/>
+                </a:solidFill>
+                <a:latin typeface="Calibri"/>
+              </a:defRPr>
+            </a:pPr>
+            <a:r>
+              <a:t>• Daily &amp; Weekly Food Supply Inflow Demand:</a:t>
+            </a:r>
+          </a:p>
+          <a:p>
+            <a:pPr algn="l">
+              <a:defRPr sz="880" b="1" i="0">
+                <a:solidFill>
+                  <a:srgbClr val="D946EF"/>
+                </a:solidFill>
+                <a:latin typeface="Calibri"/>
+              </a:defRPr>
+            </a:pPr>
+            <a:r>
+              <a:t>   M_daily = [ Population × 0.45 kg ] / 1000  =  1.80 Metric Tons / day</a:t>
+            </a:r>
+          </a:p>
+          <a:p>
+            <a:pPr algn="l">
+              <a:defRPr sz="850" b="0" i="0">
+                <a:solidFill>
+                  <a:srgbClr val="334155"/>
+                </a:solidFill>
+                <a:latin typeface="Calibri"/>
+              </a:defRPr>
+            </a:pPr>
+            <a:r>
+              <a:t>   M_weekly = 1.80 × 7 = 12.57 Metric Tons / week (WFP supply truck logistics).</a:t>
+            </a:r>
+          </a:p>
+          <a:p>
+            <a:pPr algn="l">
+              <a:defRPr sz="919" b="1" i="0">
+                <a:solidFill>
+                  <a:srgbClr val="0F172A"/>
+                </a:solidFill>
+                <a:latin typeface="Calibri"/>
+              </a:defRPr>
+            </a:pPr>
+            <a:r>
+              <a:t>• Distinct Food Court Infrastructure:</a:t>
+            </a:r>
+          </a:p>
+          <a:p>
+            <a:pPr algn="l">
+              <a:defRPr sz="850" b="0" i="0">
+                <a:solidFill>
+                  <a:srgbClr val="334155"/>
+                </a:solidFill>
+                <a:latin typeface="Calibri"/>
+              </a:defRPr>
+            </a:pPr>
+            <a:r>
+              <a:t>   Rendered in Vibrant Magenta Marquee Canopies (#D946EF) for zero visual clash</a:t>
+            </a:r>
+          </a:p>
+          <a:p>
+            <a:pPr algn="l">
+              <a:defRPr sz="850" b="0" i="0">
+                <a:solidFill>
+                  <a:srgbClr val="334155"/>
+                </a:solidFill>
+                <a:latin typeface="Calibri"/>
+              </a:defRPr>
+            </a:pPr>
+            <a:r>
+              <a:t>   with amber tents. Includes 3,000 meals/day hot kitchen and 15-day dry ration depot.</a:t>
+            </a:r>
+          </a:p>
+          <a:p>
+            <a:pPr algn="l">
+              <a:defRPr sz="919" b="1" i="0">
+                <a:solidFill>
+                  <a:srgbClr val="0F172A"/>
+                </a:solidFill>
+                <a:latin typeface="Calibri"/>
+              </a:defRPr>
+            </a:pPr>
+            <a:r>
+              <a:t>• Emergency Solar Microgrid Power Formulation:</a:t>
+            </a:r>
+          </a:p>
+          <a:p>
+            <a:pPr algn="l">
+              <a:defRPr sz="880" b="1" i="0">
+                <a:solidFill>
+                  <a:srgbClr val="EA580C"/>
+                </a:solidFill>
+                <a:latin typeface="Calibri"/>
+              </a:defRPr>
+            </a:pPr>
+            <a:r>
+              <a:t>   Standard: 30 Watts peak / person  →  P_solar = 3,990 × 30W  =  119.7 kW Peak array.</a:t>
+            </a:r>
+          </a:p>
+          <a:p>
+            <a:pPr algn="l">
+              <a:defRPr sz="850" b="0" i="0">
+                <a:solidFill>
+                  <a:srgbClr val="334155"/>
+                </a:solidFill>
+                <a:latin typeface="Calibri"/>
+              </a:defRPr>
+            </a:pPr>
+            <a:r>
+              <a:t>   Battery Storage: 119.7 kW × 4 hrs  =  478.8 kWh lithium storage reserve.</a:t>
+            </a:r>
+          </a:p>
+          <a:p>
+            <a:pPr algn="l">
+              <a:defRPr sz="830" b="0" i="0">
+                <a:solidFill>
+                  <a:srgbClr val="475569"/>
+                </a:solidFill>
+                <a:latin typeface="Calibri"/>
+              </a:defRPr>
+            </a:pPr>
+            <a:r>
+              <a:t>   Powers health clinic cold-chain, submersible water pumps, and area lighting.</a:t>
+            </a:r>
+          </a:p>
+          <a:p>
+            <a:pPr algn="l">
+              <a:defRPr sz="919" b="1" i="0">
+                <a:solidFill>
+                  <a:srgbClr val="0F172A"/>
+                </a:solidFill>
+                <a:latin typeface="Calibri"/>
+              </a:defRPr>
+            </a:pPr>
+            <a:r>
+              <a:t>• Emergency Health Clinic Standards:</a:t>
+            </a:r>
+          </a:p>
+          <a:p>
+            <a:pPr algn="l">
+              <a:defRPr sz="850" b="0" i="0">
+                <a:solidFill>
+                  <a:srgbClr val="334155"/>
+                </a:solidFill>
+                <a:latin typeface="Calibri"/>
+              </a:defRPr>
+            </a:pPr>
+            <a:r>
+              <a:t>   1 Health Clinic per 10,000–20,000 people (30–50 beds, 40–60 L/patient/day water).</a:t>
+            </a:r>
+          </a:p>
+        </p:txBody>
+      </p:sp>
+    </p:spTree>
   </p:cSld>
   <p:clrMapOvr>
     <a:masterClrMapping/>
